--- a/Clase6.pptx
+++ b/Clase6.pptx
@@ -13,6 +13,10 @@
     <p:sldId id="268" r:id="rId7"/>
     <p:sldId id="270" r:id="rId8"/>
     <p:sldId id="271" r:id="rId9"/>
+    <p:sldId id="272" r:id="rId10"/>
+    <p:sldId id="273" r:id="rId11"/>
+    <p:sldId id="274" r:id="rId12"/>
+    <p:sldId id="275" r:id="rId13"/>
   </p:sldIdLst>
   <p:sldSz cx="12192000" cy="6858000"/>
   <p:notesSz cx="6858000" cy="9144000"/>
@@ -111,6 +115,11 @@
       </a:defRPr>
     </a:lvl9pPr>
   </p:defaultTextStyle>
+  <p:extLst>
+    <p:ext uri="{EFAFB233-063F-42B5-8137-9DF3F51BA10A}">
+      <p15:sldGuideLst xmlns:p15="http://schemas.microsoft.com/office/powerpoint/2012/main"/>
+    </p:ext>
+  </p:extLst>
 </p:presentation>
 </file>
 
@@ -261,7 +270,7 @@
           <a:p>
             <a:fld id="{B79A2D9D-F137-4163-855D-360766367DD3}" type="datetimeFigureOut">
               <a:rPr lang="en-US" smtClean="0"/>
-              <a:t>2/15/2026</a:t>
+              <a:t>2/28/2026</a:t>
             </a:fld>
             <a:endParaRPr lang="en-US"/>
           </a:p>
@@ -459,7 +468,7 @@
           <a:p>
             <a:fld id="{B79A2D9D-F137-4163-855D-360766367DD3}" type="datetimeFigureOut">
               <a:rPr lang="en-US" smtClean="0"/>
-              <a:t>2/15/2026</a:t>
+              <a:t>2/28/2026</a:t>
             </a:fld>
             <a:endParaRPr lang="en-US"/>
           </a:p>
@@ -667,7 +676,7 @@
           <a:p>
             <a:fld id="{B79A2D9D-F137-4163-855D-360766367DD3}" type="datetimeFigureOut">
               <a:rPr lang="en-US" smtClean="0"/>
-              <a:t>2/15/2026</a:t>
+              <a:t>2/28/2026</a:t>
             </a:fld>
             <a:endParaRPr lang="en-US"/>
           </a:p>
@@ -865,7 +874,7 @@
           <a:p>
             <a:fld id="{B79A2D9D-F137-4163-855D-360766367DD3}" type="datetimeFigureOut">
               <a:rPr lang="en-US" smtClean="0"/>
-              <a:t>2/15/2026</a:t>
+              <a:t>2/28/2026</a:t>
             </a:fld>
             <a:endParaRPr lang="en-US"/>
           </a:p>
@@ -1140,7 +1149,7 @@
           <a:p>
             <a:fld id="{B79A2D9D-F137-4163-855D-360766367DD3}" type="datetimeFigureOut">
               <a:rPr lang="en-US" smtClean="0"/>
-              <a:t>2/15/2026</a:t>
+              <a:t>2/28/2026</a:t>
             </a:fld>
             <a:endParaRPr lang="en-US"/>
           </a:p>
@@ -1405,7 +1414,7 @@
           <a:p>
             <a:fld id="{B79A2D9D-F137-4163-855D-360766367DD3}" type="datetimeFigureOut">
               <a:rPr lang="en-US" smtClean="0"/>
-              <a:t>2/15/2026</a:t>
+              <a:t>2/28/2026</a:t>
             </a:fld>
             <a:endParaRPr lang="en-US"/>
           </a:p>
@@ -1817,7 +1826,7 @@
           <a:p>
             <a:fld id="{B79A2D9D-F137-4163-855D-360766367DD3}" type="datetimeFigureOut">
               <a:rPr lang="en-US" smtClean="0"/>
-              <a:t>2/15/2026</a:t>
+              <a:t>2/28/2026</a:t>
             </a:fld>
             <a:endParaRPr lang="en-US"/>
           </a:p>
@@ -1958,7 +1967,7 @@
           <a:p>
             <a:fld id="{B79A2D9D-F137-4163-855D-360766367DD3}" type="datetimeFigureOut">
               <a:rPr lang="en-US" smtClean="0"/>
-              <a:t>2/15/2026</a:t>
+              <a:t>2/28/2026</a:t>
             </a:fld>
             <a:endParaRPr lang="en-US"/>
           </a:p>
@@ -2071,7 +2080,7 @@
           <a:p>
             <a:fld id="{B79A2D9D-F137-4163-855D-360766367DD3}" type="datetimeFigureOut">
               <a:rPr lang="en-US" smtClean="0"/>
-              <a:t>2/15/2026</a:t>
+              <a:t>2/28/2026</a:t>
             </a:fld>
             <a:endParaRPr lang="en-US"/>
           </a:p>
@@ -2382,7 +2391,7 @@
           <a:p>
             <a:fld id="{B79A2D9D-F137-4163-855D-360766367DD3}" type="datetimeFigureOut">
               <a:rPr lang="en-US" smtClean="0"/>
-              <a:t>2/15/2026</a:t>
+              <a:t>2/28/2026</a:t>
             </a:fld>
             <a:endParaRPr lang="en-US"/>
           </a:p>
@@ -2670,7 +2679,7 @@
           <a:p>
             <a:fld id="{B79A2D9D-F137-4163-855D-360766367DD3}" type="datetimeFigureOut">
               <a:rPr lang="en-US" smtClean="0"/>
-              <a:t>2/15/2026</a:t>
+              <a:t>2/28/2026</a:t>
             </a:fld>
             <a:endParaRPr lang="en-US"/>
           </a:p>
@@ -2911,7 +2920,7 @@
           <a:p>
             <a:fld id="{B79A2D9D-F137-4163-855D-360766367DD3}" type="datetimeFigureOut">
               <a:rPr lang="en-US" smtClean="0"/>
-              <a:t>2/15/2026</a:t>
+              <a:t>2/28/2026</a:t>
             </a:fld>
             <a:endParaRPr lang="en-US"/>
           </a:p>
@@ -3581,6 +3590,3442 @@
 </p:sld>
 </file>
 
+<file path=ppt/slides/slide10.xml><?xml version="1.0" encoding="utf-8"?>
+<p:sld xmlns:a="http://schemas.openxmlformats.org/drawingml/2006/main" xmlns:r="http://schemas.openxmlformats.org/officeDocument/2006/relationships" xmlns:p="http://schemas.openxmlformats.org/presentationml/2006/main">
+  <p:cSld>
+    <p:spTree>
+      <p:nvGrpSpPr>
+        <p:cNvPr id="1" name="">
+          <a:extLst>
+            <a:ext uri="{FF2B5EF4-FFF2-40B4-BE49-F238E27FC236}">
+              <a16:creationId xmlns:a16="http://schemas.microsoft.com/office/drawing/2014/main" id="{076F1568-2E7B-592D-0E9E-6DBAAFEC0D15}"/>
+            </a:ext>
+          </a:extLst>
+        </p:cNvPr>
+        <p:cNvGrpSpPr/>
+        <p:nvPr/>
+      </p:nvGrpSpPr>
+      <p:grpSpPr>
+        <a:xfrm>
+          <a:off x="0" y="0"/>
+          <a:ext cx="0" cy="0"/>
+          <a:chOff x="0" y="0"/>
+          <a:chExt cx="0" cy="0"/>
+        </a:xfrm>
+      </p:grpSpPr>
+      <p:sp>
+        <p:nvSpPr>
+          <p:cNvPr id="6" name="Content Placeholder 2">
+            <a:extLst>
+              <a:ext uri="{FF2B5EF4-FFF2-40B4-BE49-F238E27FC236}">
+                <a16:creationId xmlns:a16="http://schemas.microsoft.com/office/drawing/2014/main" id="{E621FB57-E697-1076-A9F6-2A32ADEAE6B4}"/>
+              </a:ext>
+            </a:extLst>
+          </p:cNvPr>
+          <p:cNvSpPr txBox="1">
+            <a:spLocks/>
+          </p:cNvSpPr>
+          <p:nvPr/>
+        </p:nvSpPr>
+        <p:spPr>
+          <a:xfrm>
+            <a:off x="601579" y="361439"/>
+            <a:ext cx="4211053" cy="1924561"/>
+          </a:xfrm>
+          <a:prstGeom prst="rect">
+            <a:avLst/>
+          </a:prstGeom>
+        </p:spPr>
+        <p:txBody>
+          <a:bodyPr vert="horz" lIns="91440" tIns="45720" rIns="91440" bIns="45720" rtlCol="0">
+            <a:normAutofit lnSpcReduction="10000"/>
+          </a:bodyPr>
+          <a:lstStyle>
+            <a:lvl1pPr marL="228600" indent="-228600" algn="l" defTabSz="914400" rtl="0" eaLnBrk="1" latinLnBrk="0" hangingPunct="1">
+              <a:lnSpc>
+                <a:spcPct val="90000"/>
+              </a:lnSpc>
+              <a:spcBef>
+                <a:spcPts val="1000"/>
+              </a:spcBef>
+              <a:buFont typeface="Arial" panose="020B0604020202020204" pitchFamily="34" charset="0"/>
+              <a:buChar char="•"/>
+              <a:defRPr sz="2800" kern="1200">
+                <a:solidFill>
+                  <a:schemeClr val="tx1"/>
+                </a:solidFill>
+                <a:latin typeface="+mn-lt"/>
+                <a:ea typeface="+mn-ea"/>
+                <a:cs typeface="+mn-cs"/>
+              </a:defRPr>
+            </a:lvl1pPr>
+            <a:lvl2pPr marL="685800" indent="-228600" algn="l" defTabSz="914400" rtl="0" eaLnBrk="1" latinLnBrk="0" hangingPunct="1">
+              <a:lnSpc>
+                <a:spcPct val="90000"/>
+              </a:lnSpc>
+              <a:spcBef>
+                <a:spcPts val="500"/>
+              </a:spcBef>
+              <a:buFont typeface="Arial" panose="020B0604020202020204" pitchFamily="34" charset="0"/>
+              <a:buChar char="•"/>
+              <a:defRPr sz="2400" kern="1200">
+                <a:solidFill>
+                  <a:schemeClr val="tx1"/>
+                </a:solidFill>
+                <a:latin typeface="+mn-lt"/>
+                <a:ea typeface="+mn-ea"/>
+                <a:cs typeface="+mn-cs"/>
+              </a:defRPr>
+            </a:lvl2pPr>
+            <a:lvl3pPr marL="1143000" indent="-228600" algn="l" defTabSz="914400" rtl="0" eaLnBrk="1" latinLnBrk="0" hangingPunct="1">
+              <a:lnSpc>
+                <a:spcPct val="90000"/>
+              </a:lnSpc>
+              <a:spcBef>
+                <a:spcPts val="500"/>
+              </a:spcBef>
+              <a:buFont typeface="Arial" panose="020B0604020202020204" pitchFamily="34" charset="0"/>
+              <a:buChar char="•"/>
+              <a:defRPr sz="2000" kern="1200">
+                <a:solidFill>
+                  <a:schemeClr val="tx1"/>
+                </a:solidFill>
+                <a:latin typeface="+mn-lt"/>
+                <a:ea typeface="+mn-ea"/>
+                <a:cs typeface="+mn-cs"/>
+              </a:defRPr>
+            </a:lvl3pPr>
+            <a:lvl4pPr marL="1600200" indent="-228600" algn="l" defTabSz="914400" rtl="0" eaLnBrk="1" latinLnBrk="0" hangingPunct="1">
+              <a:lnSpc>
+                <a:spcPct val="90000"/>
+              </a:lnSpc>
+              <a:spcBef>
+                <a:spcPts val="500"/>
+              </a:spcBef>
+              <a:buFont typeface="Arial" panose="020B0604020202020204" pitchFamily="34" charset="0"/>
+              <a:buChar char="•"/>
+              <a:defRPr sz="1800" kern="1200">
+                <a:solidFill>
+                  <a:schemeClr val="tx1"/>
+                </a:solidFill>
+                <a:latin typeface="+mn-lt"/>
+                <a:ea typeface="+mn-ea"/>
+                <a:cs typeface="+mn-cs"/>
+              </a:defRPr>
+            </a:lvl4pPr>
+            <a:lvl5pPr marL="2057400" indent="-228600" algn="l" defTabSz="914400" rtl="0" eaLnBrk="1" latinLnBrk="0" hangingPunct="1">
+              <a:lnSpc>
+                <a:spcPct val="90000"/>
+              </a:lnSpc>
+              <a:spcBef>
+                <a:spcPts val="500"/>
+              </a:spcBef>
+              <a:buFont typeface="Arial" panose="020B0604020202020204" pitchFamily="34" charset="0"/>
+              <a:buChar char="•"/>
+              <a:defRPr sz="1800" kern="1200">
+                <a:solidFill>
+                  <a:schemeClr val="tx1"/>
+                </a:solidFill>
+                <a:latin typeface="+mn-lt"/>
+                <a:ea typeface="+mn-ea"/>
+                <a:cs typeface="+mn-cs"/>
+              </a:defRPr>
+            </a:lvl5pPr>
+            <a:lvl6pPr marL="2514600" indent="-228600" algn="l" defTabSz="914400" rtl="0" eaLnBrk="1" latinLnBrk="0" hangingPunct="1">
+              <a:lnSpc>
+                <a:spcPct val="90000"/>
+              </a:lnSpc>
+              <a:spcBef>
+                <a:spcPts val="500"/>
+              </a:spcBef>
+              <a:buFont typeface="Arial" panose="020B0604020202020204" pitchFamily="34" charset="0"/>
+              <a:buChar char="•"/>
+              <a:defRPr sz="1800" kern="1200">
+                <a:solidFill>
+                  <a:schemeClr val="tx1"/>
+                </a:solidFill>
+                <a:latin typeface="+mn-lt"/>
+                <a:ea typeface="+mn-ea"/>
+                <a:cs typeface="+mn-cs"/>
+              </a:defRPr>
+            </a:lvl6pPr>
+            <a:lvl7pPr marL="2971800" indent="-228600" algn="l" defTabSz="914400" rtl="0" eaLnBrk="1" latinLnBrk="0" hangingPunct="1">
+              <a:lnSpc>
+                <a:spcPct val="90000"/>
+              </a:lnSpc>
+              <a:spcBef>
+                <a:spcPts val="500"/>
+              </a:spcBef>
+              <a:buFont typeface="Arial" panose="020B0604020202020204" pitchFamily="34" charset="0"/>
+              <a:buChar char="•"/>
+              <a:defRPr sz="1800" kern="1200">
+                <a:solidFill>
+                  <a:schemeClr val="tx1"/>
+                </a:solidFill>
+                <a:latin typeface="+mn-lt"/>
+                <a:ea typeface="+mn-ea"/>
+                <a:cs typeface="+mn-cs"/>
+              </a:defRPr>
+            </a:lvl7pPr>
+            <a:lvl8pPr marL="3429000" indent="-228600" algn="l" defTabSz="914400" rtl="0" eaLnBrk="1" latinLnBrk="0" hangingPunct="1">
+              <a:lnSpc>
+                <a:spcPct val="90000"/>
+              </a:lnSpc>
+              <a:spcBef>
+                <a:spcPts val="500"/>
+              </a:spcBef>
+              <a:buFont typeface="Arial" panose="020B0604020202020204" pitchFamily="34" charset="0"/>
+              <a:buChar char="•"/>
+              <a:defRPr sz="1800" kern="1200">
+                <a:solidFill>
+                  <a:schemeClr val="tx1"/>
+                </a:solidFill>
+                <a:latin typeface="+mn-lt"/>
+                <a:ea typeface="+mn-ea"/>
+                <a:cs typeface="+mn-cs"/>
+              </a:defRPr>
+            </a:lvl8pPr>
+            <a:lvl9pPr marL="3886200" indent="-228600" algn="l" defTabSz="914400" rtl="0" eaLnBrk="1" latinLnBrk="0" hangingPunct="1">
+              <a:lnSpc>
+                <a:spcPct val="90000"/>
+              </a:lnSpc>
+              <a:spcBef>
+                <a:spcPts val="500"/>
+              </a:spcBef>
+              <a:buFont typeface="Arial" panose="020B0604020202020204" pitchFamily="34" charset="0"/>
+              <a:buChar char="•"/>
+              <a:defRPr sz="1800" kern="1200">
+                <a:solidFill>
+                  <a:schemeClr val="tx1"/>
+                </a:solidFill>
+                <a:latin typeface="+mn-lt"/>
+                <a:ea typeface="+mn-ea"/>
+                <a:cs typeface="+mn-cs"/>
+              </a:defRPr>
+            </a:lvl9pPr>
+          </a:lstStyle>
+          <a:p>
+            <a:pPr marL="0" indent="0">
+              <a:buNone/>
+            </a:pPr>
+            <a:r>
+              <a:rPr lang="en-US" sz="2400" b="1" dirty="0"/>
+              <a:t>17- Hacer </a:t>
+            </a:r>
+            <a:r>
+              <a:rPr lang="en-US" sz="2400" b="1" dirty="0" err="1"/>
+              <a:t>una</a:t>
+            </a:r>
+            <a:r>
+              <a:rPr lang="en-US" sz="2400" b="1" dirty="0"/>
+              <a:t> </a:t>
+            </a:r>
+            <a:r>
+              <a:rPr lang="en-US" sz="2400" b="1" dirty="0" err="1"/>
+              <a:t>copia</a:t>
+            </a:r>
+            <a:r>
+              <a:rPr lang="en-US" sz="2400" b="1" dirty="0"/>
+              <a:t> del </a:t>
+            </a:r>
+            <a:r>
+              <a:rPr lang="en-US" sz="2400" b="1" dirty="0" err="1"/>
+              <a:t>mapa</a:t>
+            </a:r>
+            <a:r>
+              <a:rPr lang="en-US" sz="2400" b="1" dirty="0"/>
+              <a:t> </a:t>
+            </a:r>
+            <a:r>
+              <a:rPr lang="en-US" sz="2400" b="1" dirty="0" err="1"/>
+              <a:t>quitar</a:t>
+            </a:r>
+            <a:r>
+              <a:rPr lang="en-US" sz="2400" b="1" dirty="0"/>
+              <a:t> la </a:t>
+            </a:r>
+            <a:r>
+              <a:rPr lang="en-US" sz="2400" b="1" dirty="0" err="1"/>
+              <a:t>locacion</a:t>
+            </a:r>
+            <a:r>
+              <a:rPr lang="en-US" sz="2400" b="1" dirty="0"/>
+              <a:t> [</a:t>
+            </a:r>
+            <a:r>
+              <a:rPr lang="en-US" sz="2400" b="1" dirty="0" err="1"/>
+              <a:t>alcaldia_catalogo</a:t>
+            </a:r>
+            <a:r>
+              <a:rPr lang="en-US" sz="2400" b="1" dirty="0"/>
+              <a:t>] y </a:t>
+            </a:r>
+            <a:r>
+              <a:rPr lang="en-US" sz="2400" b="1" dirty="0" err="1"/>
+              <a:t>colocar</a:t>
+            </a:r>
+            <a:r>
+              <a:rPr lang="en-US" sz="2400" b="1" dirty="0"/>
+              <a:t> los campos </a:t>
+            </a:r>
+            <a:r>
+              <a:rPr lang="en-US" sz="2400" b="1" dirty="0" err="1"/>
+              <a:t>en</a:t>
+            </a:r>
+            <a:r>
+              <a:rPr lang="en-US" sz="2400" b="1" dirty="0"/>
+              <a:t> latitude y </a:t>
+            </a:r>
+            <a:r>
+              <a:rPr lang="en-US" sz="2400" b="1" dirty="0" err="1"/>
+              <a:t>longitud</a:t>
+            </a:r>
+            <a:r>
+              <a:rPr lang="en-US" sz="2400" b="1" dirty="0"/>
+              <a:t> </a:t>
+            </a:r>
+            <a:r>
+              <a:rPr lang="en-US" sz="2400" b="1" dirty="0" err="1"/>
+              <a:t>en</a:t>
+            </a:r>
+            <a:r>
+              <a:rPr lang="en-US" sz="2400" b="1" dirty="0"/>
+              <a:t> sus </a:t>
+            </a:r>
+            <a:r>
+              <a:rPr lang="en-US" sz="2400" b="1" dirty="0" err="1"/>
+              <a:t>respectivos</a:t>
+            </a:r>
+            <a:r>
+              <a:rPr lang="en-US" sz="2400" b="1" dirty="0"/>
+              <a:t> </a:t>
+            </a:r>
+            <a:r>
+              <a:rPr lang="en-US" sz="2400" b="1" dirty="0" err="1"/>
+              <a:t>espacios</a:t>
+            </a:r>
+            <a:endParaRPr lang="en-US" sz="2400" b="1" dirty="0"/>
+          </a:p>
+        </p:txBody>
+      </p:sp>
+      <p:pic>
+        <p:nvPicPr>
+          <p:cNvPr id="3" name="Picture 2">
+            <a:extLst>
+              <a:ext uri="{FF2B5EF4-FFF2-40B4-BE49-F238E27FC236}">
+                <a16:creationId xmlns:a16="http://schemas.microsoft.com/office/drawing/2014/main" id="{DAEB095A-9157-28B4-6FF2-7E9E8BA04F56}"/>
+              </a:ext>
+            </a:extLst>
+          </p:cNvPr>
+          <p:cNvPicPr>
+            <a:picLocks noChangeAspect="1"/>
+          </p:cNvPicPr>
+          <p:nvPr/>
+        </p:nvPicPr>
+        <p:blipFill>
+          <a:blip r:embed="rId2"/>
+          <a:stretch>
+            <a:fillRect/>
+          </a:stretch>
+        </p:blipFill>
+        <p:spPr>
+          <a:xfrm>
+            <a:off x="507602" y="2189256"/>
+            <a:ext cx="4677441" cy="2808923"/>
+          </a:xfrm>
+          <a:prstGeom prst="rect">
+            <a:avLst/>
+          </a:prstGeom>
+        </p:spPr>
+      </p:pic>
+      <p:sp>
+        <p:nvSpPr>
+          <p:cNvPr id="4" name="Content Placeholder 2">
+            <a:extLst>
+              <a:ext uri="{FF2B5EF4-FFF2-40B4-BE49-F238E27FC236}">
+                <a16:creationId xmlns:a16="http://schemas.microsoft.com/office/drawing/2014/main" id="{D56F75DC-9892-E430-91B5-F248F5A43B0C}"/>
+              </a:ext>
+            </a:extLst>
+          </p:cNvPr>
+          <p:cNvSpPr txBox="1">
+            <a:spLocks/>
+          </p:cNvSpPr>
+          <p:nvPr/>
+        </p:nvSpPr>
+        <p:spPr>
+          <a:xfrm>
+            <a:off x="6096000" y="361439"/>
+            <a:ext cx="5229726" cy="1547572"/>
+          </a:xfrm>
+          <a:prstGeom prst="rect">
+            <a:avLst/>
+          </a:prstGeom>
+        </p:spPr>
+        <p:txBody>
+          <a:bodyPr vert="horz" lIns="91440" tIns="45720" rIns="91440" bIns="45720" rtlCol="0">
+            <a:normAutofit/>
+          </a:bodyPr>
+          <a:lstStyle>
+            <a:lvl1pPr marL="228600" indent="-228600" algn="l" defTabSz="914400" rtl="0" eaLnBrk="1" latinLnBrk="0" hangingPunct="1">
+              <a:lnSpc>
+                <a:spcPct val="90000"/>
+              </a:lnSpc>
+              <a:spcBef>
+                <a:spcPts val="1000"/>
+              </a:spcBef>
+              <a:buFont typeface="Arial" panose="020B0604020202020204" pitchFamily="34" charset="0"/>
+              <a:buChar char="•"/>
+              <a:defRPr sz="2800" kern="1200">
+                <a:solidFill>
+                  <a:schemeClr val="tx1"/>
+                </a:solidFill>
+                <a:latin typeface="+mn-lt"/>
+                <a:ea typeface="+mn-ea"/>
+                <a:cs typeface="+mn-cs"/>
+              </a:defRPr>
+            </a:lvl1pPr>
+            <a:lvl2pPr marL="685800" indent="-228600" algn="l" defTabSz="914400" rtl="0" eaLnBrk="1" latinLnBrk="0" hangingPunct="1">
+              <a:lnSpc>
+                <a:spcPct val="90000"/>
+              </a:lnSpc>
+              <a:spcBef>
+                <a:spcPts val="500"/>
+              </a:spcBef>
+              <a:buFont typeface="Arial" panose="020B0604020202020204" pitchFamily="34" charset="0"/>
+              <a:buChar char="•"/>
+              <a:defRPr sz="2400" kern="1200">
+                <a:solidFill>
+                  <a:schemeClr val="tx1"/>
+                </a:solidFill>
+                <a:latin typeface="+mn-lt"/>
+                <a:ea typeface="+mn-ea"/>
+                <a:cs typeface="+mn-cs"/>
+              </a:defRPr>
+            </a:lvl2pPr>
+            <a:lvl3pPr marL="1143000" indent="-228600" algn="l" defTabSz="914400" rtl="0" eaLnBrk="1" latinLnBrk="0" hangingPunct="1">
+              <a:lnSpc>
+                <a:spcPct val="90000"/>
+              </a:lnSpc>
+              <a:spcBef>
+                <a:spcPts val="500"/>
+              </a:spcBef>
+              <a:buFont typeface="Arial" panose="020B0604020202020204" pitchFamily="34" charset="0"/>
+              <a:buChar char="•"/>
+              <a:defRPr sz="2000" kern="1200">
+                <a:solidFill>
+                  <a:schemeClr val="tx1"/>
+                </a:solidFill>
+                <a:latin typeface="+mn-lt"/>
+                <a:ea typeface="+mn-ea"/>
+                <a:cs typeface="+mn-cs"/>
+              </a:defRPr>
+            </a:lvl3pPr>
+            <a:lvl4pPr marL="1600200" indent="-228600" algn="l" defTabSz="914400" rtl="0" eaLnBrk="1" latinLnBrk="0" hangingPunct="1">
+              <a:lnSpc>
+                <a:spcPct val="90000"/>
+              </a:lnSpc>
+              <a:spcBef>
+                <a:spcPts val="500"/>
+              </a:spcBef>
+              <a:buFont typeface="Arial" panose="020B0604020202020204" pitchFamily="34" charset="0"/>
+              <a:buChar char="•"/>
+              <a:defRPr sz="1800" kern="1200">
+                <a:solidFill>
+                  <a:schemeClr val="tx1"/>
+                </a:solidFill>
+                <a:latin typeface="+mn-lt"/>
+                <a:ea typeface="+mn-ea"/>
+                <a:cs typeface="+mn-cs"/>
+              </a:defRPr>
+            </a:lvl4pPr>
+            <a:lvl5pPr marL="2057400" indent="-228600" algn="l" defTabSz="914400" rtl="0" eaLnBrk="1" latinLnBrk="0" hangingPunct="1">
+              <a:lnSpc>
+                <a:spcPct val="90000"/>
+              </a:lnSpc>
+              <a:spcBef>
+                <a:spcPts val="500"/>
+              </a:spcBef>
+              <a:buFont typeface="Arial" panose="020B0604020202020204" pitchFamily="34" charset="0"/>
+              <a:buChar char="•"/>
+              <a:defRPr sz="1800" kern="1200">
+                <a:solidFill>
+                  <a:schemeClr val="tx1"/>
+                </a:solidFill>
+                <a:latin typeface="+mn-lt"/>
+                <a:ea typeface="+mn-ea"/>
+                <a:cs typeface="+mn-cs"/>
+              </a:defRPr>
+            </a:lvl5pPr>
+            <a:lvl6pPr marL="2514600" indent="-228600" algn="l" defTabSz="914400" rtl="0" eaLnBrk="1" latinLnBrk="0" hangingPunct="1">
+              <a:lnSpc>
+                <a:spcPct val="90000"/>
+              </a:lnSpc>
+              <a:spcBef>
+                <a:spcPts val="500"/>
+              </a:spcBef>
+              <a:buFont typeface="Arial" panose="020B0604020202020204" pitchFamily="34" charset="0"/>
+              <a:buChar char="•"/>
+              <a:defRPr sz="1800" kern="1200">
+                <a:solidFill>
+                  <a:schemeClr val="tx1"/>
+                </a:solidFill>
+                <a:latin typeface="+mn-lt"/>
+                <a:ea typeface="+mn-ea"/>
+                <a:cs typeface="+mn-cs"/>
+              </a:defRPr>
+            </a:lvl6pPr>
+            <a:lvl7pPr marL="2971800" indent="-228600" algn="l" defTabSz="914400" rtl="0" eaLnBrk="1" latinLnBrk="0" hangingPunct="1">
+              <a:lnSpc>
+                <a:spcPct val="90000"/>
+              </a:lnSpc>
+              <a:spcBef>
+                <a:spcPts val="500"/>
+              </a:spcBef>
+              <a:buFont typeface="Arial" panose="020B0604020202020204" pitchFamily="34" charset="0"/>
+              <a:buChar char="•"/>
+              <a:defRPr sz="1800" kern="1200">
+                <a:solidFill>
+                  <a:schemeClr val="tx1"/>
+                </a:solidFill>
+                <a:latin typeface="+mn-lt"/>
+                <a:ea typeface="+mn-ea"/>
+                <a:cs typeface="+mn-cs"/>
+              </a:defRPr>
+            </a:lvl7pPr>
+            <a:lvl8pPr marL="3429000" indent="-228600" algn="l" defTabSz="914400" rtl="0" eaLnBrk="1" latinLnBrk="0" hangingPunct="1">
+              <a:lnSpc>
+                <a:spcPct val="90000"/>
+              </a:lnSpc>
+              <a:spcBef>
+                <a:spcPts val="500"/>
+              </a:spcBef>
+              <a:buFont typeface="Arial" panose="020B0604020202020204" pitchFamily="34" charset="0"/>
+              <a:buChar char="•"/>
+              <a:defRPr sz="1800" kern="1200">
+                <a:solidFill>
+                  <a:schemeClr val="tx1"/>
+                </a:solidFill>
+                <a:latin typeface="+mn-lt"/>
+                <a:ea typeface="+mn-ea"/>
+                <a:cs typeface="+mn-cs"/>
+              </a:defRPr>
+            </a:lvl8pPr>
+            <a:lvl9pPr marL="3886200" indent="-228600" algn="l" defTabSz="914400" rtl="0" eaLnBrk="1" latinLnBrk="0" hangingPunct="1">
+              <a:lnSpc>
+                <a:spcPct val="90000"/>
+              </a:lnSpc>
+              <a:spcBef>
+                <a:spcPts val="500"/>
+              </a:spcBef>
+              <a:buFont typeface="Arial" panose="020B0604020202020204" pitchFamily="34" charset="0"/>
+              <a:buChar char="•"/>
+              <a:defRPr sz="1800" kern="1200">
+                <a:solidFill>
+                  <a:schemeClr val="tx1"/>
+                </a:solidFill>
+                <a:latin typeface="+mn-lt"/>
+                <a:ea typeface="+mn-ea"/>
+                <a:cs typeface="+mn-cs"/>
+              </a:defRPr>
+            </a:lvl9pPr>
+          </a:lstStyle>
+          <a:p>
+            <a:pPr marL="0" indent="0">
+              <a:buNone/>
+            </a:pPr>
+            <a:r>
+              <a:rPr lang="en-US" sz="2400" b="1" dirty="0"/>
+              <a:t>18- En la </a:t>
+            </a:r>
+            <a:r>
+              <a:rPr lang="en-US" sz="2400" b="1" dirty="0" err="1"/>
+              <a:t>columna</a:t>
+            </a:r>
+            <a:r>
+              <a:rPr lang="en-US" sz="2400" b="1" dirty="0"/>
+              <a:t> [</a:t>
+            </a:r>
+            <a:r>
+              <a:rPr lang="en-US" sz="2400" b="1" dirty="0" err="1"/>
+              <a:t>alcaldia_catalogo</a:t>
+            </a:r>
+            <a:r>
+              <a:rPr lang="en-US" sz="2400" b="1" dirty="0"/>
+              <a:t>] </a:t>
+            </a:r>
+            <a:r>
+              <a:rPr lang="en-US" sz="2400" b="1" dirty="0" err="1"/>
+              <a:t>agregar</a:t>
+            </a:r>
+            <a:r>
+              <a:rPr lang="en-US" sz="2400" b="1" dirty="0"/>
+              <a:t> un </a:t>
+            </a:r>
+            <a:r>
+              <a:rPr lang="en-US" sz="2400" b="1" dirty="0" err="1"/>
+              <a:t>sufijo</a:t>
+            </a:r>
+            <a:r>
+              <a:rPr lang="en-US" sz="2400" b="1" dirty="0"/>
+              <a:t> ( ,CMDX) para </a:t>
+            </a:r>
+            <a:r>
+              <a:rPr lang="en-US" sz="2400" b="1" dirty="0" err="1"/>
+              <a:t>corregir</a:t>
+            </a:r>
+            <a:r>
+              <a:rPr lang="en-US" sz="2400" b="1" dirty="0"/>
+              <a:t> los </a:t>
+            </a:r>
+            <a:r>
+              <a:rPr lang="en-US" sz="2400" b="1" dirty="0" err="1"/>
+              <a:t>errores</a:t>
+            </a:r>
+            <a:endParaRPr lang="en-US" sz="2400" b="1" dirty="0"/>
+          </a:p>
+        </p:txBody>
+      </p:sp>
+      <p:pic>
+        <p:nvPicPr>
+          <p:cNvPr id="10" name="Picture 9" descr="A screenshot of a computer&#10;&#10;AI-generated content may be incorrect.">
+            <a:extLst>
+              <a:ext uri="{FF2B5EF4-FFF2-40B4-BE49-F238E27FC236}">
+                <a16:creationId xmlns:a16="http://schemas.microsoft.com/office/drawing/2014/main" id="{0F8F096B-B790-5DE9-580E-148AE8AC9797}"/>
+              </a:ext>
+            </a:extLst>
+          </p:cNvPr>
+          <p:cNvPicPr>
+            <a:picLocks noChangeAspect="1"/>
+          </p:cNvPicPr>
+          <p:nvPr/>
+        </p:nvPicPr>
+        <p:blipFill>
+          <a:blip r:embed="rId3">
+            <a:extLst>
+              <a:ext uri="{28A0092B-C50C-407E-A947-70E740481C1C}">
+                <a14:useLocalDpi xmlns:a14="http://schemas.microsoft.com/office/drawing/2010/main" val="0"/>
+              </a:ext>
+            </a:extLst>
+          </a:blip>
+          <a:srcRect b="36397"/>
+          <a:stretch/>
+        </p:blipFill>
+        <p:spPr>
+          <a:xfrm>
+            <a:off x="7176566" y="1715915"/>
+            <a:ext cx="2793603" cy="2808923"/>
+          </a:xfrm>
+          <a:prstGeom prst="rect">
+            <a:avLst/>
+          </a:prstGeom>
+        </p:spPr>
+      </p:pic>
+      <p:sp>
+        <p:nvSpPr>
+          <p:cNvPr id="11" name="Rectangle 10">
+            <a:extLst>
+              <a:ext uri="{FF2B5EF4-FFF2-40B4-BE49-F238E27FC236}">
+                <a16:creationId xmlns:a16="http://schemas.microsoft.com/office/drawing/2014/main" id="{CFD96629-950A-7461-37A8-C6A3B22FC3D8}"/>
+              </a:ext>
+            </a:extLst>
+          </p:cNvPr>
+          <p:cNvSpPr/>
+          <p:nvPr/>
+        </p:nvSpPr>
+        <p:spPr>
+          <a:xfrm>
+            <a:off x="9488905" y="1770507"/>
+            <a:ext cx="513348" cy="595704"/>
+          </a:xfrm>
+          <a:prstGeom prst="rect">
+            <a:avLst/>
+          </a:prstGeom>
+          <a:noFill/>
+          <a:ln w="28575">
+            <a:solidFill>
+              <a:srgbClr val="FF0000"/>
+            </a:solidFill>
+          </a:ln>
+        </p:spPr>
+        <p:style>
+          <a:lnRef idx="2">
+            <a:schemeClr val="accent1">
+              <a:shade val="15000"/>
+            </a:schemeClr>
+          </a:lnRef>
+          <a:fillRef idx="1">
+            <a:schemeClr val="accent1"/>
+          </a:fillRef>
+          <a:effectRef idx="0">
+            <a:schemeClr val="accent1"/>
+          </a:effectRef>
+          <a:fontRef idx="minor">
+            <a:schemeClr val="lt1"/>
+          </a:fontRef>
+        </p:style>
+        <p:txBody>
+          <a:bodyPr rtlCol="0" anchor="ctr"/>
+          <a:lstStyle/>
+          <a:p>
+            <a:pPr algn="ctr"/>
+            <a:endParaRPr lang="en-US"/>
+          </a:p>
+        </p:txBody>
+      </p:sp>
+      <p:sp>
+        <p:nvSpPr>
+          <p:cNvPr id="12" name="Rectangle 11">
+            <a:extLst>
+              <a:ext uri="{FF2B5EF4-FFF2-40B4-BE49-F238E27FC236}">
+                <a16:creationId xmlns:a16="http://schemas.microsoft.com/office/drawing/2014/main" id="{6ACDD56A-7AED-8546-B0AE-207266764E74}"/>
+              </a:ext>
+            </a:extLst>
+          </p:cNvPr>
+          <p:cNvSpPr/>
+          <p:nvPr/>
+        </p:nvSpPr>
+        <p:spPr>
+          <a:xfrm>
+            <a:off x="8573366" y="3429000"/>
+            <a:ext cx="1027833" cy="266068"/>
+          </a:xfrm>
+          <a:prstGeom prst="rect">
+            <a:avLst/>
+          </a:prstGeom>
+          <a:noFill/>
+          <a:ln w="28575">
+            <a:solidFill>
+              <a:srgbClr val="FF0000"/>
+            </a:solidFill>
+          </a:ln>
+        </p:spPr>
+        <p:style>
+          <a:lnRef idx="2">
+            <a:schemeClr val="accent1">
+              <a:shade val="15000"/>
+            </a:schemeClr>
+          </a:lnRef>
+          <a:fillRef idx="1">
+            <a:schemeClr val="accent1"/>
+          </a:fillRef>
+          <a:effectRef idx="0">
+            <a:schemeClr val="accent1"/>
+          </a:effectRef>
+          <a:fontRef idx="minor">
+            <a:schemeClr val="lt1"/>
+          </a:fontRef>
+        </p:style>
+        <p:txBody>
+          <a:bodyPr rtlCol="0" anchor="ctr"/>
+          <a:lstStyle/>
+          <a:p>
+            <a:pPr algn="ctr"/>
+            <a:endParaRPr lang="en-US"/>
+          </a:p>
+        </p:txBody>
+      </p:sp>
+      <p:sp>
+        <p:nvSpPr>
+          <p:cNvPr id="13" name="Content Placeholder 2">
+            <a:extLst>
+              <a:ext uri="{FF2B5EF4-FFF2-40B4-BE49-F238E27FC236}">
+                <a16:creationId xmlns:a16="http://schemas.microsoft.com/office/drawing/2014/main" id="{1D3E400D-B590-9030-A6B3-39D71DBFC22B}"/>
+              </a:ext>
+            </a:extLst>
+          </p:cNvPr>
+          <p:cNvSpPr txBox="1">
+            <a:spLocks/>
+          </p:cNvSpPr>
+          <p:nvPr/>
+        </p:nvSpPr>
+        <p:spPr>
+          <a:xfrm>
+            <a:off x="152400" y="5590673"/>
+            <a:ext cx="5398168" cy="955077"/>
+          </a:xfrm>
+          <a:prstGeom prst="rect">
+            <a:avLst/>
+          </a:prstGeom>
+        </p:spPr>
+        <p:txBody>
+          <a:bodyPr vert="horz" lIns="91440" tIns="45720" rIns="91440" bIns="45720" rtlCol="0">
+            <a:normAutofit/>
+          </a:bodyPr>
+          <a:lstStyle>
+            <a:lvl1pPr marL="228600" indent="-228600" algn="l" defTabSz="914400" rtl="0" eaLnBrk="1" latinLnBrk="0" hangingPunct="1">
+              <a:lnSpc>
+                <a:spcPct val="90000"/>
+              </a:lnSpc>
+              <a:spcBef>
+                <a:spcPts val="1000"/>
+              </a:spcBef>
+              <a:buFont typeface="Arial" panose="020B0604020202020204" pitchFamily="34" charset="0"/>
+              <a:buChar char="•"/>
+              <a:defRPr sz="2800" kern="1200">
+                <a:solidFill>
+                  <a:schemeClr val="tx1"/>
+                </a:solidFill>
+                <a:latin typeface="+mn-lt"/>
+                <a:ea typeface="+mn-ea"/>
+                <a:cs typeface="+mn-cs"/>
+              </a:defRPr>
+            </a:lvl1pPr>
+            <a:lvl2pPr marL="685800" indent="-228600" algn="l" defTabSz="914400" rtl="0" eaLnBrk="1" latinLnBrk="0" hangingPunct="1">
+              <a:lnSpc>
+                <a:spcPct val="90000"/>
+              </a:lnSpc>
+              <a:spcBef>
+                <a:spcPts val="500"/>
+              </a:spcBef>
+              <a:buFont typeface="Arial" panose="020B0604020202020204" pitchFamily="34" charset="0"/>
+              <a:buChar char="•"/>
+              <a:defRPr sz="2400" kern="1200">
+                <a:solidFill>
+                  <a:schemeClr val="tx1"/>
+                </a:solidFill>
+                <a:latin typeface="+mn-lt"/>
+                <a:ea typeface="+mn-ea"/>
+                <a:cs typeface="+mn-cs"/>
+              </a:defRPr>
+            </a:lvl2pPr>
+            <a:lvl3pPr marL="1143000" indent="-228600" algn="l" defTabSz="914400" rtl="0" eaLnBrk="1" latinLnBrk="0" hangingPunct="1">
+              <a:lnSpc>
+                <a:spcPct val="90000"/>
+              </a:lnSpc>
+              <a:spcBef>
+                <a:spcPts val="500"/>
+              </a:spcBef>
+              <a:buFont typeface="Arial" panose="020B0604020202020204" pitchFamily="34" charset="0"/>
+              <a:buChar char="•"/>
+              <a:defRPr sz="2000" kern="1200">
+                <a:solidFill>
+                  <a:schemeClr val="tx1"/>
+                </a:solidFill>
+                <a:latin typeface="+mn-lt"/>
+                <a:ea typeface="+mn-ea"/>
+                <a:cs typeface="+mn-cs"/>
+              </a:defRPr>
+            </a:lvl3pPr>
+            <a:lvl4pPr marL="1600200" indent="-228600" algn="l" defTabSz="914400" rtl="0" eaLnBrk="1" latinLnBrk="0" hangingPunct="1">
+              <a:lnSpc>
+                <a:spcPct val="90000"/>
+              </a:lnSpc>
+              <a:spcBef>
+                <a:spcPts val="500"/>
+              </a:spcBef>
+              <a:buFont typeface="Arial" panose="020B0604020202020204" pitchFamily="34" charset="0"/>
+              <a:buChar char="•"/>
+              <a:defRPr sz="1800" kern="1200">
+                <a:solidFill>
+                  <a:schemeClr val="tx1"/>
+                </a:solidFill>
+                <a:latin typeface="+mn-lt"/>
+                <a:ea typeface="+mn-ea"/>
+                <a:cs typeface="+mn-cs"/>
+              </a:defRPr>
+            </a:lvl4pPr>
+            <a:lvl5pPr marL="2057400" indent="-228600" algn="l" defTabSz="914400" rtl="0" eaLnBrk="1" latinLnBrk="0" hangingPunct="1">
+              <a:lnSpc>
+                <a:spcPct val="90000"/>
+              </a:lnSpc>
+              <a:spcBef>
+                <a:spcPts val="500"/>
+              </a:spcBef>
+              <a:buFont typeface="Arial" panose="020B0604020202020204" pitchFamily="34" charset="0"/>
+              <a:buChar char="•"/>
+              <a:defRPr sz="1800" kern="1200">
+                <a:solidFill>
+                  <a:schemeClr val="tx1"/>
+                </a:solidFill>
+                <a:latin typeface="+mn-lt"/>
+                <a:ea typeface="+mn-ea"/>
+                <a:cs typeface="+mn-cs"/>
+              </a:defRPr>
+            </a:lvl5pPr>
+            <a:lvl6pPr marL="2514600" indent="-228600" algn="l" defTabSz="914400" rtl="0" eaLnBrk="1" latinLnBrk="0" hangingPunct="1">
+              <a:lnSpc>
+                <a:spcPct val="90000"/>
+              </a:lnSpc>
+              <a:spcBef>
+                <a:spcPts val="500"/>
+              </a:spcBef>
+              <a:buFont typeface="Arial" panose="020B0604020202020204" pitchFamily="34" charset="0"/>
+              <a:buChar char="•"/>
+              <a:defRPr sz="1800" kern="1200">
+                <a:solidFill>
+                  <a:schemeClr val="tx1"/>
+                </a:solidFill>
+                <a:latin typeface="+mn-lt"/>
+                <a:ea typeface="+mn-ea"/>
+                <a:cs typeface="+mn-cs"/>
+              </a:defRPr>
+            </a:lvl6pPr>
+            <a:lvl7pPr marL="2971800" indent="-228600" algn="l" defTabSz="914400" rtl="0" eaLnBrk="1" latinLnBrk="0" hangingPunct="1">
+              <a:lnSpc>
+                <a:spcPct val="90000"/>
+              </a:lnSpc>
+              <a:spcBef>
+                <a:spcPts val="500"/>
+              </a:spcBef>
+              <a:buFont typeface="Arial" panose="020B0604020202020204" pitchFamily="34" charset="0"/>
+              <a:buChar char="•"/>
+              <a:defRPr sz="1800" kern="1200">
+                <a:solidFill>
+                  <a:schemeClr val="tx1"/>
+                </a:solidFill>
+                <a:latin typeface="+mn-lt"/>
+                <a:ea typeface="+mn-ea"/>
+                <a:cs typeface="+mn-cs"/>
+              </a:defRPr>
+            </a:lvl7pPr>
+            <a:lvl8pPr marL="3429000" indent="-228600" algn="l" defTabSz="914400" rtl="0" eaLnBrk="1" latinLnBrk="0" hangingPunct="1">
+              <a:lnSpc>
+                <a:spcPct val="90000"/>
+              </a:lnSpc>
+              <a:spcBef>
+                <a:spcPts val="500"/>
+              </a:spcBef>
+              <a:buFont typeface="Arial" panose="020B0604020202020204" pitchFamily="34" charset="0"/>
+              <a:buChar char="•"/>
+              <a:defRPr sz="1800" kern="1200">
+                <a:solidFill>
+                  <a:schemeClr val="tx1"/>
+                </a:solidFill>
+                <a:latin typeface="+mn-lt"/>
+                <a:ea typeface="+mn-ea"/>
+                <a:cs typeface="+mn-cs"/>
+              </a:defRPr>
+            </a:lvl8pPr>
+            <a:lvl9pPr marL="3886200" indent="-228600" algn="l" defTabSz="914400" rtl="0" eaLnBrk="1" latinLnBrk="0" hangingPunct="1">
+              <a:lnSpc>
+                <a:spcPct val="90000"/>
+              </a:lnSpc>
+              <a:spcBef>
+                <a:spcPts val="500"/>
+              </a:spcBef>
+              <a:buFont typeface="Arial" panose="020B0604020202020204" pitchFamily="34" charset="0"/>
+              <a:buChar char="•"/>
+              <a:defRPr sz="1800" kern="1200">
+                <a:solidFill>
+                  <a:schemeClr val="tx1"/>
+                </a:solidFill>
+                <a:latin typeface="+mn-lt"/>
+                <a:ea typeface="+mn-ea"/>
+                <a:cs typeface="+mn-cs"/>
+              </a:defRPr>
+            </a:lvl9pPr>
+          </a:lstStyle>
+          <a:p>
+            <a:pPr marL="0" indent="0">
+              <a:buNone/>
+            </a:pPr>
+            <a:r>
+              <a:rPr lang="en-US" sz="1400" b="1" dirty="0">
+                <a:solidFill>
+                  <a:srgbClr val="0070C0"/>
+                </a:solidFill>
+              </a:rPr>
+              <a:t>Nota: observer que </a:t>
+            </a:r>
+            <a:r>
+              <a:rPr lang="en-US" sz="1400" b="1" dirty="0" err="1">
+                <a:solidFill>
+                  <a:srgbClr val="0070C0"/>
+                </a:solidFill>
+              </a:rPr>
+              <a:t>cuando</a:t>
+            </a:r>
+            <a:r>
+              <a:rPr lang="en-US" sz="1400" b="1" dirty="0">
+                <a:solidFill>
+                  <a:srgbClr val="0070C0"/>
+                </a:solidFill>
+              </a:rPr>
+              <a:t> </a:t>
+            </a:r>
+            <a:r>
+              <a:rPr lang="en-US" sz="1400" b="1" dirty="0" err="1">
+                <a:solidFill>
+                  <a:srgbClr val="0070C0"/>
+                </a:solidFill>
+              </a:rPr>
+              <a:t>usas</a:t>
+            </a:r>
+            <a:r>
+              <a:rPr lang="en-US" sz="1400" b="1" dirty="0">
+                <a:solidFill>
+                  <a:srgbClr val="0070C0"/>
+                </a:solidFill>
+              </a:rPr>
+              <a:t> las </a:t>
+            </a:r>
+            <a:r>
+              <a:rPr lang="en-US" sz="1400" b="1" dirty="0" err="1">
+                <a:solidFill>
+                  <a:srgbClr val="0070C0"/>
+                </a:solidFill>
+              </a:rPr>
+              <a:t>coordenadas</a:t>
+            </a:r>
+            <a:r>
+              <a:rPr lang="en-US" sz="1400" b="1" dirty="0">
+                <a:solidFill>
+                  <a:srgbClr val="0070C0"/>
+                </a:solidFill>
+              </a:rPr>
+              <a:t> se genera un punto </a:t>
+            </a:r>
+            <a:r>
+              <a:rPr lang="en-US" sz="1400" b="1" dirty="0" err="1">
+                <a:solidFill>
+                  <a:srgbClr val="0070C0"/>
+                </a:solidFill>
+              </a:rPr>
+              <a:t>por</a:t>
+            </a:r>
+            <a:r>
+              <a:rPr lang="en-US" sz="1400" b="1" dirty="0">
+                <a:solidFill>
+                  <a:srgbClr val="0070C0"/>
+                </a:solidFill>
+              </a:rPr>
+              <a:t> </a:t>
+            </a:r>
+            <a:r>
+              <a:rPr lang="en-US" sz="1400" b="1" dirty="0" err="1">
+                <a:solidFill>
+                  <a:srgbClr val="0070C0"/>
+                </a:solidFill>
+              </a:rPr>
+              <a:t>cada</a:t>
+            </a:r>
+            <a:r>
+              <a:rPr lang="en-US" sz="1400" b="1" dirty="0">
+                <a:solidFill>
+                  <a:srgbClr val="0070C0"/>
+                </a:solidFill>
+              </a:rPr>
+              <a:t> </a:t>
+            </a:r>
+            <a:r>
+              <a:rPr lang="en-US" sz="1400" b="1" dirty="0" err="1">
+                <a:solidFill>
+                  <a:srgbClr val="0070C0"/>
+                </a:solidFill>
+              </a:rPr>
+              <a:t>incidente</a:t>
+            </a:r>
+            <a:r>
+              <a:rPr lang="en-US" sz="1400" b="1" dirty="0">
+                <a:solidFill>
+                  <a:srgbClr val="0070C0"/>
+                </a:solidFill>
+              </a:rPr>
+              <a:t> lo que no </a:t>
+            </a:r>
+            <a:r>
+              <a:rPr lang="en-US" sz="1400" b="1" dirty="0" err="1">
+                <a:solidFill>
+                  <a:srgbClr val="0070C0"/>
+                </a:solidFill>
+              </a:rPr>
+              <a:t>ayuda</a:t>
+            </a:r>
+            <a:r>
+              <a:rPr lang="en-US" sz="1400" b="1" dirty="0">
+                <a:solidFill>
+                  <a:srgbClr val="0070C0"/>
+                </a:solidFill>
+              </a:rPr>
+              <a:t> tanto al </a:t>
+            </a:r>
+            <a:r>
+              <a:rPr lang="en-US" sz="1400" b="1" dirty="0" err="1">
+                <a:solidFill>
+                  <a:srgbClr val="0070C0"/>
+                </a:solidFill>
+              </a:rPr>
+              <a:t>analisis</a:t>
+            </a:r>
+            <a:r>
+              <a:rPr lang="en-US" sz="1400" b="1" dirty="0">
+                <a:solidFill>
+                  <a:srgbClr val="0070C0"/>
+                </a:solidFill>
+              </a:rPr>
+              <a:t> de las </a:t>
+            </a:r>
+            <a:r>
+              <a:rPr lang="en-US" sz="1400" b="1" dirty="0" err="1">
+                <a:solidFill>
+                  <a:srgbClr val="0070C0"/>
+                </a:solidFill>
+              </a:rPr>
+              <a:t>alcaldias</a:t>
+            </a:r>
+            <a:endParaRPr lang="en-US" sz="1400" b="1" dirty="0">
+              <a:solidFill>
+                <a:srgbClr val="0070C0"/>
+              </a:solidFill>
+            </a:endParaRPr>
+          </a:p>
+        </p:txBody>
+      </p:sp>
+      <p:sp>
+        <p:nvSpPr>
+          <p:cNvPr id="15" name="Content Placeholder 2">
+            <a:extLst>
+              <a:ext uri="{FF2B5EF4-FFF2-40B4-BE49-F238E27FC236}">
+                <a16:creationId xmlns:a16="http://schemas.microsoft.com/office/drawing/2014/main" id="{81ADA9B3-4D31-12F8-7BE6-CECE85C924A9}"/>
+              </a:ext>
+            </a:extLst>
+          </p:cNvPr>
+          <p:cNvSpPr txBox="1">
+            <a:spLocks/>
+          </p:cNvSpPr>
+          <p:nvPr/>
+        </p:nvSpPr>
+        <p:spPr>
+          <a:xfrm>
+            <a:off x="6516535" y="5590673"/>
+            <a:ext cx="5398168" cy="955077"/>
+          </a:xfrm>
+          <a:prstGeom prst="rect">
+            <a:avLst/>
+          </a:prstGeom>
+        </p:spPr>
+        <p:txBody>
+          <a:bodyPr vert="horz" lIns="91440" tIns="45720" rIns="91440" bIns="45720" rtlCol="0">
+            <a:normAutofit/>
+          </a:bodyPr>
+          <a:lstStyle>
+            <a:lvl1pPr marL="228600" indent="-228600" algn="l" defTabSz="914400" rtl="0" eaLnBrk="1" latinLnBrk="0" hangingPunct="1">
+              <a:lnSpc>
+                <a:spcPct val="90000"/>
+              </a:lnSpc>
+              <a:spcBef>
+                <a:spcPts val="1000"/>
+              </a:spcBef>
+              <a:buFont typeface="Arial" panose="020B0604020202020204" pitchFamily="34" charset="0"/>
+              <a:buChar char="•"/>
+              <a:defRPr sz="2800" kern="1200">
+                <a:solidFill>
+                  <a:schemeClr val="tx1"/>
+                </a:solidFill>
+                <a:latin typeface="+mn-lt"/>
+                <a:ea typeface="+mn-ea"/>
+                <a:cs typeface="+mn-cs"/>
+              </a:defRPr>
+            </a:lvl1pPr>
+            <a:lvl2pPr marL="685800" indent="-228600" algn="l" defTabSz="914400" rtl="0" eaLnBrk="1" latinLnBrk="0" hangingPunct="1">
+              <a:lnSpc>
+                <a:spcPct val="90000"/>
+              </a:lnSpc>
+              <a:spcBef>
+                <a:spcPts val="500"/>
+              </a:spcBef>
+              <a:buFont typeface="Arial" panose="020B0604020202020204" pitchFamily="34" charset="0"/>
+              <a:buChar char="•"/>
+              <a:defRPr sz="2400" kern="1200">
+                <a:solidFill>
+                  <a:schemeClr val="tx1"/>
+                </a:solidFill>
+                <a:latin typeface="+mn-lt"/>
+                <a:ea typeface="+mn-ea"/>
+                <a:cs typeface="+mn-cs"/>
+              </a:defRPr>
+            </a:lvl2pPr>
+            <a:lvl3pPr marL="1143000" indent="-228600" algn="l" defTabSz="914400" rtl="0" eaLnBrk="1" latinLnBrk="0" hangingPunct="1">
+              <a:lnSpc>
+                <a:spcPct val="90000"/>
+              </a:lnSpc>
+              <a:spcBef>
+                <a:spcPts val="500"/>
+              </a:spcBef>
+              <a:buFont typeface="Arial" panose="020B0604020202020204" pitchFamily="34" charset="0"/>
+              <a:buChar char="•"/>
+              <a:defRPr sz="2000" kern="1200">
+                <a:solidFill>
+                  <a:schemeClr val="tx1"/>
+                </a:solidFill>
+                <a:latin typeface="+mn-lt"/>
+                <a:ea typeface="+mn-ea"/>
+                <a:cs typeface="+mn-cs"/>
+              </a:defRPr>
+            </a:lvl3pPr>
+            <a:lvl4pPr marL="1600200" indent="-228600" algn="l" defTabSz="914400" rtl="0" eaLnBrk="1" latinLnBrk="0" hangingPunct="1">
+              <a:lnSpc>
+                <a:spcPct val="90000"/>
+              </a:lnSpc>
+              <a:spcBef>
+                <a:spcPts val="500"/>
+              </a:spcBef>
+              <a:buFont typeface="Arial" panose="020B0604020202020204" pitchFamily="34" charset="0"/>
+              <a:buChar char="•"/>
+              <a:defRPr sz="1800" kern="1200">
+                <a:solidFill>
+                  <a:schemeClr val="tx1"/>
+                </a:solidFill>
+                <a:latin typeface="+mn-lt"/>
+                <a:ea typeface="+mn-ea"/>
+                <a:cs typeface="+mn-cs"/>
+              </a:defRPr>
+            </a:lvl4pPr>
+            <a:lvl5pPr marL="2057400" indent="-228600" algn="l" defTabSz="914400" rtl="0" eaLnBrk="1" latinLnBrk="0" hangingPunct="1">
+              <a:lnSpc>
+                <a:spcPct val="90000"/>
+              </a:lnSpc>
+              <a:spcBef>
+                <a:spcPts val="500"/>
+              </a:spcBef>
+              <a:buFont typeface="Arial" panose="020B0604020202020204" pitchFamily="34" charset="0"/>
+              <a:buChar char="•"/>
+              <a:defRPr sz="1800" kern="1200">
+                <a:solidFill>
+                  <a:schemeClr val="tx1"/>
+                </a:solidFill>
+                <a:latin typeface="+mn-lt"/>
+                <a:ea typeface="+mn-ea"/>
+                <a:cs typeface="+mn-cs"/>
+              </a:defRPr>
+            </a:lvl5pPr>
+            <a:lvl6pPr marL="2514600" indent="-228600" algn="l" defTabSz="914400" rtl="0" eaLnBrk="1" latinLnBrk="0" hangingPunct="1">
+              <a:lnSpc>
+                <a:spcPct val="90000"/>
+              </a:lnSpc>
+              <a:spcBef>
+                <a:spcPts val="500"/>
+              </a:spcBef>
+              <a:buFont typeface="Arial" panose="020B0604020202020204" pitchFamily="34" charset="0"/>
+              <a:buChar char="•"/>
+              <a:defRPr sz="1800" kern="1200">
+                <a:solidFill>
+                  <a:schemeClr val="tx1"/>
+                </a:solidFill>
+                <a:latin typeface="+mn-lt"/>
+                <a:ea typeface="+mn-ea"/>
+                <a:cs typeface="+mn-cs"/>
+              </a:defRPr>
+            </a:lvl6pPr>
+            <a:lvl7pPr marL="2971800" indent="-228600" algn="l" defTabSz="914400" rtl="0" eaLnBrk="1" latinLnBrk="0" hangingPunct="1">
+              <a:lnSpc>
+                <a:spcPct val="90000"/>
+              </a:lnSpc>
+              <a:spcBef>
+                <a:spcPts val="500"/>
+              </a:spcBef>
+              <a:buFont typeface="Arial" panose="020B0604020202020204" pitchFamily="34" charset="0"/>
+              <a:buChar char="•"/>
+              <a:defRPr sz="1800" kern="1200">
+                <a:solidFill>
+                  <a:schemeClr val="tx1"/>
+                </a:solidFill>
+                <a:latin typeface="+mn-lt"/>
+                <a:ea typeface="+mn-ea"/>
+                <a:cs typeface="+mn-cs"/>
+              </a:defRPr>
+            </a:lvl7pPr>
+            <a:lvl8pPr marL="3429000" indent="-228600" algn="l" defTabSz="914400" rtl="0" eaLnBrk="1" latinLnBrk="0" hangingPunct="1">
+              <a:lnSpc>
+                <a:spcPct val="90000"/>
+              </a:lnSpc>
+              <a:spcBef>
+                <a:spcPts val="500"/>
+              </a:spcBef>
+              <a:buFont typeface="Arial" panose="020B0604020202020204" pitchFamily="34" charset="0"/>
+              <a:buChar char="•"/>
+              <a:defRPr sz="1800" kern="1200">
+                <a:solidFill>
+                  <a:schemeClr val="tx1"/>
+                </a:solidFill>
+                <a:latin typeface="+mn-lt"/>
+                <a:ea typeface="+mn-ea"/>
+                <a:cs typeface="+mn-cs"/>
+              </a:defRPr>
+            </a:lvl8pPr>
+            <a:lvl9pPr marL="3886200" indent="-228600" algn="l" defTabSz="914400" rtl="0" eaLnBrk="1" latinLnBrk="0" hangingPunct="1">
+              <a:lnSpc>
+                <a:spcPct val="90000"/>
+              </a:lnSpc>
+              <a:spcBef>
+                <a:spcPts val="500"/>
+              </a:spcBef>
+              <a:buFont typeface="Arial" panose="020B0604020202020204" pitchFamily="34" charset="0"/>
+              <a:buChar char="•"/>
+              <a:defRPr sz="1800" kern="1200">
+                <a:solidFill>
+                  <a:schemeClr val="tx1"/>
+                </a:solidFill>
+                <a:latin typeface="+mn-lt"/>
+                <a:ea typeface="+mn-ea"/>
+                <a:cs typeface="+mn-cs"/>
+              </a:defRPr>
+            </a:lvl9pPr>
+          </a:lstStyle>
+          <a:p>
+            <a:pPr marL="0" indent="0">
+              <a:buNone/>
+            </a:pPr>
+            <a:r>
+              <a:rPr lang="en-US" sz="1400" b="1" dirty="0">
+                <a:solidFill>
+                  <a:srgbClr val="0070C0"/>
+                </a:solidFill>
+              </a:rPr>
+              <a:t>Al </a:t>
+            </a:r>
+            <a:r>
+              <a:rPr lang="en-US" sz="1400" b="1" dirty="0" err="1">
+                <a:solidFill>
+                  <a:srgbClr val="0070C0"/>
+                </a:solidFill>
+              </a:rPr>
+              <a:t>agegar</a:t>
+            </a:r>
+            <a:r>
+              <a:rPr lang="en-US" sz="1400" b="1" dirty="0">
+                <a:solidFill>
+                  <a:srgbClr val="0070C0"/>
+                </a:solidFill>
+              </a:rPr>
+              <a:t> el </a:t>
+            </a:r>
+            <a:r>
+              <a:rPr lang="en-US" sz="1400" b="1" dirty="0" err="1">
+                <a:solidFill>
+                  <a:srgbClr val="0070C0"/>
+                </a:solidFill>
+              </a:rPr>
+              <a:t>sufijo</a:t>
+            </a:r>
+            <a:r>
+              <a:rPr lang="en-US" sz="1400" b="1" dirty="0">
+                <a:solidFill>
+                  <a:srgbClr val="0070C0"/>
+                </a:solidFill>
+              </a:rPr>
+              <a:t> se </a:t>
+            </a:r>
+            <a:r>
+              <a:rPr lang="en-US" sz="1400" b="1" dirty="0" err="1">
+                <a:solidFill>
+                  <a:srgbClr val="0070C0"/>
+                </a:solidFill>
+              </a:rPr>
+              <a:t>agrega</a:t>
+            </a:r>
+            <a:r>
+              <a:rPr lang="en-US" sz="1400" b="1" dirty="0">
+                <a:solidFill>
+                  <a:srgbClr val="0070C0"/>
+                </a:solidFill>
+              </a:rPr>
+              <a:t> mas </a:t>
+            </a:r>
+            <a:r>
+              <a:rPr lang="en-US" sz="1400" b="1" dirty="0" err="1">
+                <a:solidFill>
+                  <a:srgbClr val="0070C0"/>
+                </a:solidFill>
+              </a:rPr>
+              <a:t>detalle</a:t>
+            </a:r>
+            <a:r>
+              <a:rPr lang="en-US" sz="1400" b="1" dirty="0">
+                <a:solidFill>
+                  <a:srgbClr val="0070C0"/>
+                </a:solidFill>
+              </a:rPr>
+              <a:t> a la </a:t>
+            </a:r>
+            <a:r>
+              <a:rPr lang="en-US" sz="1400" b="1" dirty="0" err="1">
+                <a:solidFill>
+                  <a:srgbClr val="0070C0"/>
+                </a:solidFill>
+              </a:rPr>
+              <a:t>locacion</a:t>
+            </a:r>
+            <a:r>
+              <a:rPr lang="en-US" sz="1400" b="1" dirty="0">
+                <a:solidFill>
+                  <a:srgbClr val="0070C0"/>
+                </a:solidFill>
+              </a:rPr>
+              <a:t> </a:t>
+            </a:r>
+            <a:r>
+              <a:rPr lang="en-US" sz="1400" b="1" dirty="0" err="1">
+                <a:solidFill>
+                  <a:srgbClr val="0070C0"/>
+                </a:solidFill>
+              </a:rPr>
+              <a:t>evitando</a:t>
+            </a:r>
+            <a:r>
+              <a:rPr lang="en-US" sz="1400" b="1" dirty="0">
+                <a:solidFill>
+                  <a:srgbClr val="0070C0"/>
+                </a:solidFill>
+              </a:rPr>
+              <a:t> que </a:t>
+            </a:r>
+            <a:r>
+              <a:rPr lang="en-US" sz="1400" b="1" dirty="0" err="1">
+                <a:solidFill>
+                  <a:srgbClr val="0070C0"/>
+                </a:solidFill>
+              </a:rPr>
+              <a:t>si</a:t>
+            </a:r>
+            <a:r>
+              <a:rPr lang="en-US" sz="1400" b="1" dirty="0">
+                <a:solidFill>
+                  <a:srgbClr val="0070C0"/>
+                </a:solidFill>
+              </a:rPr>
+              <a:t> </a:t>
+            </a:r>
+            <a:r>
+              <a:rPr lang="en-US" sz="1400" b="1" dirty="0" err="1">
+                <a:solidFill>
+                  <a:srgbClr val="0070C0"/>
+                </a:solidFill>
+              </a:rPr>
+              <a:t>existen</a:t>
+            </a:r>
+            <a:r>
+              <a:rPr lang="en-US" sz="1400" b="1" dirty="0">
+                <a:solidFill>
+                  <a:srgbClr val="0070C0"/>
+                </a:solidFill>
+              </a:rPr>
+              <a:t> mas </a:t>
+            </a:r>
+            <a:r>
+              <a:rPr lang="en-US" sz="1400" b="1" dirty="0" err="1">
+                <a:solidFill>
+                  <a:srgbClr val="0070C0"/>
+                </a:solidFill>
+              </a:rPr>
+              <a:t>ubicaciones</a:t>
+            </a:r>
+            <a:r>
+              <a:rPr lang="en-US" sz="1400" b="1" dirty="0">
+                <a:solidFill>
+                  <a:srgbClr val="0070C0"/>
+                </a:solidFill>
+              </a:rPr>
+              <a:t> </a:t>
+            </a:r>
+            <a:r>
+              <a:rPr lang="en-US" sz="1400" b="1" dirty="0" err="1">
+                <a:solidFill>
+                  <a:srgbClr val="0070C0"/>
+                </a:solidFill>
+              </a:rPr>
+              <a:t>en</a:t>
+            </a:r>
+            <a:r>
+              <a:rPr lang="en-US" sz="1400" b="1" dirty="0">
+                <a:solidFill>
+                  <a:srgbClr val="0070C0"/>
+                </a:solidFill>
+              </a:rPr>
+              <a:t> el </a:t>
+            </a:r>
+            <a:r>
+              <a:rPr lang="en-US" sz="1400" b="1" dirty="0" err="1">
+                <a:solidFill>
+                  <a:srgbClr val="0070C0"/>
+                </a:solidFill>
+              </a:rPr>
+              <a:t>mundo</a:t>
+            </a:r>
+            <a:r>
+              <a:rPr lang="en-US" sz="1400" b="1" dirty="0">
+                <a:solidFill>
+                  <a:srgbClr val="0070C0"/>
+                </a:solidFill>
+              </a:rPr>
+              <a:t> con el </a:t>
+            </a:r>
+            <a:r>
+              <a:rPr lang="en-US" sz="1400" b="1" dirty="0" err="1">
+                <a:solidFill>
+                  <a:srgbClr val="0070C0"/>
+                </a:solidFill>
+              </a:rPr>
+              <a:t>mismo</a:t>
+            </a:r>
+            <a:r>
+              <a:rPr lang="en-US" sz="1400" b="1" dirty="0">
+                <a:solidFill>
+                  <a:srgbClr val="0070C0"/>
+                </a:solidFill>
+              </a:rPr>
+              <a:t> </a:t>
+            </a:r>
+            <a:r>
+              <a:rPr lang="en-US" sz="1400" b="1" dirty="0" err="1">
+                <a:solidFill>
+                  <a:srgbClr val="0070C0"/>
+                </a:solidFill>
+              </a:rPr>
+              <a:t>nombre</a:t>
+            </a:r>
+            <a:r>
+              <a:rPr lang="en-US" sz="1400" b="1" dirty="0">
+                <a:solidFill>
+                  <a:srgbClr val="0070C0"/>
+                </a:solidFill>
+              </a:rPr>
+              <a:t> el </a:t>
+            </a:r>
+            <a:r>
+              <a:rPr lang="en-US" sz="1400" b="1" dirty="0" err="1">
+                <a:solidFill>
+                  <a:srgbClr val="0070C0"/>
+                </a:solidFill>
+              </a:rPr>
+              <a:t>mapa</a:t>
+            </a:r>
+            <a:r>
+              <a:rPr lang="en-US" sz="1400" b="1" dirty="0">
+                <a:solidFill>
+                  <a:srgbClr val="0070C0"/>
+                </a:solidFill>
+              </a:rPr>
+              <a:t> </a:t>
+            </a:r>
+            <a:r>
+              <a:rPr lang="en-US" sz="1400" b="1" dirty="0" err="1">
+                <a:solidFill>
+                  <a:srgbClr val="0070C0"/>
+                </a:solidFill>
+              </a:rPr>
+              <a:t>muestre</a:t>
+            </a:r>
+            <a:r>
+              <a:rPr lang="en-US" sz="1400" b="1" dirty="0">
+                <a:solidFill>
+                  <a:srgbClr val="0070C0"/>
+                </a:solidFill>
+              </a:rPr>
+              <a:t> </a:t>
+            </a:r>
+            <a:r>
+              <a:rPr lang="en-US" sz="1400" b="1" dirty="0" err="1">
+                <a:solidFill>
+                  <a:srgbClr val="0070C0"/>
+                </a:solidFill>
+              </a:rPr>
+              <a:t>errores</a:t>
+            </a:r>
+            <a:endParaRPr lang="en-US" sz="1400" b="1" dirty="0">
+              <a:solidFill>
+                <a:srgbClr val="0070C0"/>
+              </a:solidFill>
+            </a:endParaRPr>
+          </a:p>
+        </p:txBody>
+      </p:sp>
+    </p:spTree>
+    <p:extLst>
+      <p:ext uri="{BB962C8B-B14F-4D97-AF65-F5344CB8AC3E}">
+        <p14:creationId xmlns:p14="http://schemas.microsoft.com/office/powerpoint/2010/main" val="2535471412"/>
+      </p:ext>
+    </p:extLst>
+  </p:cSld>
+  <p:clrMapOvr>
+    <a:masterClrMapping/>
+  </p:clrMapOvr>
+</p:sld>
+</file>
+
+<file path=ppt/slides/slide11.xml><?xml version="1.0" encoding="utf-8"?>
+<p:sld xmlns:a="http://schemas.openxmlformats.org/drawingml/2006/main" xmlns:r="http://schemas.openxmlformats.org/officeDocument/2006/relationships" xmlns:p="http://schemas.openxmlformats.org/presentationml/2006/main">
+  <p:cSld>
+    <p:spTree>
+      <p:nvGrpSpPr>
+        <p:cNvPr id="1" name=""/>
+        <p:cNvGrpSpPr/>
+        <p:nvPr/>
+      </p:nvGrpSpPr>
+      <p:grpSpPr>
+        <a:xfrm>
+          <a:off x="0" y="0"/>
+          <a:ext cx="0" cy="0"/>
+          <a:chOff x="0" y="0"/>
+          <a:chExt cx="0" cy="0"/>
+        </a:xfrm>
+      </p:grpSpPr>
+      <p:pic>
+        <p:nvPicPr>
+          <p:cNvPr id="7" name="Picture 6">
+            <a:extLst>
+              <a:ext uri="{FF2B5EF4-FFF2-40B4-BE49-F238E27FC236}">
+                <a16:creationId xmlns:a16="http://schemas.microsoft.com/office/drawing/2014/main" id="{8F796F59-094C-0BA7-909B-A8E533857B96}"/>
+              </a:ext>
+            </a:extLst>
+          </p:cNvPr>
+          <p:cNvPicPr>
+            <a:picLocks noChangeAspect="1"/>
+          </p:cNvPicPr>
+          <p:nvPr/>
+        </p:nvPicPr>
+        <p:blipFill>
+          <a:blip r:embed="rId2"/>
+          <a:stretch>
+            <a:fillRect/>
+          </a:stretch>
+        </p:blipFill>
+        <p:spPr>
+          <a:xfrm>
+            <a:off x="601579" y="1587930"/>
+            <a:ext cx="4722664" cy="984313"/>
+          </a:xfrm>
+          <a:prstGeom prst="rect">
+            <a:avLst/>
+          </a:prstGeom>
+        </p:spPr>
+      </p:pic>
+      <p:sp>
+        <p:nvSpPr>
+          <p:cNvPr id="8" name="Content Placeholder 2">
+            <a:extLst>
+              <a:ext uri="{FF2B5EF4-FFF2-40B4-BE49-F238E27FC236}">
+                <a16:creationId xmlns:a16="http://schemas.microsoft.com/office/drawing/2014/main" id="{4F84B6F8-50A1-367A-1E80-7DDEBD7DC86C}"/>
+              </a:ext>
+            </a:extLst>
+          </p:cNvPr>
+          <p:cNvSpPr txBox="1">
+            <a:spLocks/>
+          </p:cNvSpPr>
+          <p:nvPr/>
+        </p:nvSpPr>
+        <p:spPr>
+          <a:xfrm>
+            <a:off x="601579" y="457454"/>
+            <a:ext cx="4283242" cy="1322982"/>
+          </a:xfrm>
+          <a:prstGeom prst="rect">
+            <a:avLst/>
+          </a:prstGeom>
+        </p:spPr>
+        <p:txBody>
+          <a:bodyPr vert="horz" lIns="91440" tIns="45720" rIns="91440" bIns="45720" rtlCol="0">
+            <a:normAutofit/>
+          </a:bodyPr>
+          <a:lstStyle>
+            <a:lvl1pPr marL="228600" indent="-228600" algn="l" defTabSz="914400" rtl="0" eaLnBrk="1" latinLnBrk="0" hangingPunct="1">
+              <a:lnSpc>
+                <a:spcPct val="90000"/>
+              </a:lnSpc>
+              <a:spcBef>
+                <a:spcPts val="1000"/>
+              </a:spcBef>
+              <a:buFont typeface="Arial" panose="020B0604020202020204" pitchFamily="34" charset="0"/>
+              <a:buChar char="•"/>
+              <a:defRPr sz="2800" kern="1200">
+                <a:solidFill>
+                  <a:schemeClr val="tx1"/>
+                </a:solidFill>
+                <a:latin typeface="+mn-lt"/>
+                <a:ea typeface="+mn-ea"/>
+                <a:cs typeface="+mn-cs"/>
+              </a:defRPr>
+            </a:lvl1pPr>
+            <a:lvl2pPr marL="685800" indent="-228600" algn="l" defTabSz="914400" rtl="0" eaLnBrk="1" latinLnBrk="0" hangingPunct="1">
+              <a:lnSpc>
+                <a:spcPct val="90000"/>
+              </a:lnSpc>
+              <a:spcBef>
+                <a:spcPts val="500"/>
+              </a:spcBef>
+              <a:buFont typeface="Arial" panose="020B0604020202020204" pitchFamily="34" charset="0"/>
+              <a:buChar char="•"/>
+              <a:defRPr sz="2400" kern="1200">
+                <a:solidFill>
+                  <a:schemeClr val="tx1"/>
+                </a:solidFill>
+                <a:latin typeface="+mn-lt"/>
+                <a:ea typeface="+mn-ea"/>
+                <a:cs typeface="+mn-cs"/>
+              </a:defRPr>
+            </a:lvl2pPr>
+            <a:lvl3pPr marL="1143000" indent="-228600" algn="l" defTabSz="914400" rtl="0" eaLnBrk="1" latinLnBrk="0" hangingPunct="1">
+              <a:lnSpc>
+                <a:spcPct val="90000"/>
+              </a:lnSpc>
+              <a:spcBef>
+                <a:spcPts val="500"/>
+              </a:spcBef>
+              <a:buFont typeface="Arial" panose="020B0604020202020204" pitchFamily="34" charset="0"/>
+              <a:buChar char="•"/>
+              <a:defRPr sz="2000" kern="1200">
+                <a:solidFill>
+                  <a:schemeClr val="tx1"/>
+                </a:solidFill>
+                <a:latin typeface="+mn-lt"/>
+                <a:ea typeface="+mn-ea"/>
+                <a:cs typeface="+mn-cs"/>
+              </a:defRPr>
+            </a:lvl3pPr>
+            <a:lvl4pPr marL="1600200" indent="-228600" algn="l" defTabSz="914400" rtl="0" eaLnBrk="1" latinLnBrk="0" hangingPunct="1">
+              <a:lnSpc>
+                <a:spcPct val="90000"/>
+              </a:lnSpc>
+              <a:spcBef>
+                <a:spcPts val="500"/>
+              </a:spcBef>
+              <a:buFont typeface="Arial" panose="020B0604020202020204" pitchFamily="34" charset="0"/>
+              <a:buChar char="•"/>
+              <a:defRPr sz="1800" kern="1200">
+                <a:solidFill>
+                  <a:schemeClr val="tx1"/>
+                </a:solidFill>
+                <a:latin typeface="+mn-lt"/>
+                <a:ea typeface="+mn-ea"/>
+                <a:cs typeface="+mn-cs"/>
+              </a:defRPr>
+            </a:lvl4pPr>
+            <a:lvl5pPr marL="2057400" indent="-228600" algn="l" defTabSz="914400" rtl="0" eaLnBrk="1" latinLnBrk="0" hangingPunct="1">
+              <a:lnSpc>
+                <a:spcPct val="90000"/>
+              </a:lnSpc>
+              <a:spcBef>
+                <a:spcPts val="500"/>
+              </a:spcBef>
+              <a:buFont typeface="Arial" panose="020B0604020202020204" pitchFamily="34" charset="0"/>
+              <a:buChar char="•"/>
+              <a:defRPr sz="1800" kern="1200">
+                <a:solidFill>
+                  <a:schemeClr val="tx1"/>
+                </a:solidFill>
+                <a:latin typeface="+mn-lt"/>
+                <a:ea typeface="+mn-ea"/>
+                <a:cs typeface="+mn-cs"/>
+              </a:defRPr>
+            </a:lvl5pPr>
+            <a:lvl6pPr marL="2514600" indent="-228600" algn="l" defTabSz="914400" rtl="0" eaLnBrk="1" latinLnBrk="0" hangingPunct="1">
+              <a:lnSpc>
+                <a:spcPct val="90000"/>
+              </a:lnSpc>
+              <a:spcBef>
+                <a:spcPts val="500"/>
+              </a:spcBef>
+              <a:buFont typeface="Arial" panose="020B0604020202020204" pitchFamily="34" charset="0"/>
+              <a:buChar char="•"/>
+              <a:defRPr sz="1800" kern="1200">
+                <a:solidFill>
+                  <a:schemeClr val="tx1"/>
+                </a:solidFill>
+                <a:latin typeface="+mn-lt"/>
+                <a:ea typeface="+mn-ea"/>
+                <a:cs typeface="+mn-cs"/>
+              </a:defRPr>
+            </a:lvl6pPr>
+            <a:lvl7pPr marL="2971800" indent="-228600" algn="l" defTabSz="914400" rtl="0" eaLnBrk="1" latinLnBrk="0" hangingPunct="1">
+              <a:lnSpc>
+                <a:spcPct val="90000"/>
+              </a:lnSpc>
+              <a:spcBef>
+                <a:spcPts val="500"/>
+              </a:spcBef>
+              <a:buFont typeface="Arial" panose="020B0604020202020204" pitchFamily="34" charset="0"/>
+              <a:buChar char="•"/>
+              <a:defRPr sz="1800" kern="1200">
+                <a:solidFill>
+                  <a:schemeClr val="tx1"/>
+                </a:solidFill>
+                <a:latin typeface="+mn-lt"/>
+                <a:ea typeface="+mn-ea"/>
+                <a:cs typeface="+mn-cs"/>
+              </a:defRPr>
+            </a:lvl7pPr>
+            <a:lvl8pPr marL="3429000" indent="-228600" algn="l" defTabSz="914400" rtl="0" eaLnBrk="1" latinLnBrk="0" hangingPunct="1">
+              <a:lnSpc>
+                <a:spcPct val="90000"/>
+              </a:lnSpc>
+              <a:spcBef>
+                <a:spcPts val="500"/>
+              </a:spcBef>
+              <a:buFont typeface="Arial" panose="020B0604020202020204" pitchFamily="34" charset="0"/>
+              <a:buChar char="•"/>
+              <a:defRPr sz="1800" kern="1200">
+                <a:solidFill>
+                  <a:schemeClr val="tx1"/>
+                </a:solidFill>
+                <a:latin typeface="+mn-lt"/>
+                <a:ea typeface="+mn-ea"/>
+                <a:cs typeface="+mn-cs"/>
+              </a:defRPr>
+            </a:lvl8pPr>
+            <a:lvl9pPr marL="3886200" indent="-228600" algn="l" defTabSz="914400" rtl="0" eaLnBrk="1" latinLnBrk="0" hangingPunct="1">
+              <a:lnSpc>
+                <a:spcPct val="90000"/>
+              </a:lnSpc>
+              <a:spcBef>
+                <a:spcPts val="500"/>
+              </a:spcBef>
+              <a:buFont typeface="Arial" panose="020B0604020202020204" pitchFamily="34" charset="0"/>
+              <a:buChar char="•"/>
+              <a:defRPr sz="1800" kern="1200">
+                <a:solidFill>
+                  <a:schemeClr val="tx1"/>
+                </a:solidFill>
+                <a:latin typeface="+mn-lt"/>
+                <a:ea typeface="+mn-ea"/>
+                <a:cs typeface="+mn-cs"/>
+              </a:defRPr>
+            </a:lvl9pPr>
+          </a:lstStyle>
+          <a:p>
+            <a:pPr marL="0" indent="0">
+              <a:buNone/>
+            </a:pPr>
+            <a:r>
+              <a:rPr lang="en-US" sz="2400" b="1" dirty="0"/>
+              <a:t>19- </a:t>
+            </a:r>
+            <a:r>
+              <a:rPr lang="en-US" sz="2400" b="1" dirty="0" err="1"/>
+              <a:t>Generar</a:t>
+            </a:r>
+            <a:r>
+              <a:rPr lang="en-US" sz="2400" b="1" dirty="0"/>
+              <a:t> </a:t>
+            </a:r>
+            <a:r>
+              <a:rPr lang="en-US" sz="2400" b="1" dirty="0" err="1"/>
+              <a:t>una</a:t>
+            </a:r>
+            <a:r>
+              <a:rPr lang="en-US" sz="2400" b="1" dirty="0"/>
+              <a:t> measure con el </a:t>
+            </a:r>
+            <a:r>
+              <a:rPr lang="en-US" sz="2400" b="1" dirty="0" err="1"/>
+              <a:t>nombre</a:t>
+            </a:r>
+            <a:r>
+              <a:rPr lang="en-US" sz="2400" b="1" dirty="0"/>
+              <a:t> </a:t>
+            </a:r>
+            <a:r>
+              <a:rPr lang="en-US" sz="2400" b="1" dirty="0" err="1"/>
+              <a:t>AvrgIncidents</a:t>
+            </a:r>
+            <a:r>
+              <a:rPr lang="en-US" sz="2400" b="1" dirty="0"/>
+              <a:t> con valor de 125,000</a:t>
+            </a:r>
+          </a:p>
+        </p:txBody>
+      </p:sp>
+      <p:pic>
+        <p:nvPicPr>
+          <p:cNvPr id="10" name="Picture 9">
+            <a:extLst>
+              <a:ext uri="{FF2B5EF4-FFF2-40B4-BE49-F238E27FC236}">
+                <a16:creationId xmlns:a16="http://schemas.microsoft.com/office/drawing/2014/main" id="{E6377BBC-A930-BBB3-1006-E913F7518CCF}"/>
+              </a:ext>
+            </a:extLst>
+          </p:cNvPr>
+          <p:cNvPicPr>
+            <a:picLocks noChangeAspect="1"/>
+          </p:cNvPicPr>
+          <p:nvPr/>
+        </p:nvPicPr>
+        <p:blipFill>
+          <a:blip r:embed="rId3"/>
+          <a:stretch>
+            <a:fillRect/>
+          </a:stretch>
+        </p:blipFill>
+        <p:spPr>
+          <a:xfrm>
+            <a:off x="7132627" y="1213252"/>
+            <a:ext cx="4369412" cy="2717981"/>
+          </a:xfrm>
+          <a:prstGeom prst="rect">
+            <a:avLst/>
+          </a:prstGeom>
+        </p:spPr>
+      </p:pic>
+      <p:pic>
+        <p:nvPicPr>
+          <p:cNvPr id="12" name="Picture 11">
+            <a:extLst>
+              <a:ext uri="{FF2B5EF4-FFF2-40B4-BE49-F238E27FC236}">
+                <a16:creationId xmlns:a16="http://schemas.microsoft.com/office/drawing/2014/main" id="{F0D956CA-6807-A96F-546A-5D3013A539BC}"/>
+              </a:ext>
+            </a:extLst>
+          </p:cNvPr>
+          <p:cNvPicPr>
+            <a:picLocks noChangeAspect="1"/>
+          </p:cNvPicPr>
+          <p:nvPr/>
+        </p:nvPicPr>
+        <p:blipFill>
+          <a:blip r:embed="rId4"/>
+          <a:stretch>
+            <a:fillRect/>
+          </a:stretch>
+        </p:blipFill>
+        <p:spPr>
+          <a:xfrm>
+            <a:off x="279449" y="4233894"/>
+            <a:ext cx="5650258" cy="2468305"/>
+          </a:xfrm>
+          <a:prstGeom prst="rect">
+            <a:avLst/>
+          </a:prstGeom>
+        </p:spPr>
+      </p:pic>
+      <p:sp>
+        <p:nvSpPr>
+          <p:cNvPr id="13" name="Content Placeholder 2">
+            <a:extLst>
+              <a:ext uri="{FF2B5EF4-FFF2-40B4-BE49-F238E27FC236}">
+                <a16:creationId xmlns:a16="http://schemas.microsoft.com/office/drawing/2014/main" id="{1840D107-9ADF-D350-FA20-495E71C3E7E3}"/>
+              </a:ext>
+            </a:extLst>
+          </p:cNvPr>
+          <p:cNvSpPr txBox="1">
+            <a:spLocks/>
+          </p:cNvSpPr>
+          <p:nvPr/>
+        </p:nvSpPr>
+        <p:spPr>
+          <a:xfrm>
+            <a:off x="489818" y="2910912"/>
+            <a:ext cx="4915301" cy="1322982"/>
+          </a:xfrm>
+          <a:prstGeom prst="rect">
+            <a:avLst/>
+          </a:prstGeom>
+        </p:spPr>
+        <p:txBody>
+          <a:bodyPr vert="horz" lIns="91440" tIns="45720" rIns="91440" bIns="45720" rtlCol="0">
+            <a:normAutofit/>
+          </a:bodyPr>
+          <a:lstStyle>
+            <a:lvl1pPr marL="228600" indent="-228600" algn="l" defTabSz="914400" rtl="0" eaLnBrk="1" latinLnBrk="0" hangingPunct="1">
+              <a:lnSpc>
+                <a:spcPct val="90000"/>
+              </a:lnSpc>
+              <a:spcBef>
+                <a:spcPts val="1000"/>
+              </a:spcBef>
+              <a:buFont typeface="Arial" panose="020B0604020202020204" pitchFamily="34" charset="0"/>
+              <a:buChar char="•"/>
+              <a:defRPr sz="2800" kern="1200">
+                <a:solidFill>
+                  <a:schemeClr val="tx1"/>
+                </a:solidFill>
+                <a:latin typeface="+mn-lt"/>
+                <a:ea typeface="+mn-ea"/>
+                <a:cs typeface="+mn-cs"/>
+              </a:defRPr>
+            </a:lvl1pPr>
+            <a:lvl2pPr marL="685800" indent="-228600" algn="l" defTabSz="914400" rtl="0" eaLnBrk="1" latinLnBrk="0" hangingPunct="1">
+              <a:lnSpc>
+                <a:spcPct val="90000"/>
+              </a:lnSpc>
+              <a:spcBef>
+                <a:spcPts val="500"/>
+              </a:spcBef>
+              <a:buFont typeface="Arial" panose="020B0604020202020204" pitchFamily="34" charset="0"/>
+              <a:buChar char="•"/>
+              <a:defRPr sz="2400" kern="1200">
+                <a:solidFill>
+                  <a:schemeClr val="tx1"/>
+                </a:solidFill>
+                <a:latin typeface="+mn-lt"/>
+                <a:ea typeface="+mn-ea"/>
+                <a:cs typeface="+mn-cs"/>
+              </a:defRPr>
+            </a:lvl2pPr>
+            <a:lvl3pPr marL="1143000" indent="-228600" algn="l" defTabSz="914400" rtl="0" eaLnBrk="1" latinLnBrk="0" hangingPunct="1">
+              <a:lnSpc>
+                <a:spcPct val="90000"/>
+              </a:lnSpc>
+              <a:spcBef>
+                <a:spcPts val="500"/>
+              </a:spcBef>
+              <a:buFont typeface="Arial" panose="020B0604020202020204" pitchFamily="34" charset="0"/>
+              <a:buChar char="•"/>
+              <a:defRPr sz="2000" kern="1200">
+                <a:solidFill>
+                  <a:schemeClr val="tx1"/>
+                </a:solidFill>
+                <a:latin typeface="+mn-lt"/>
+                <a:ea typeface="+mn-ea"/>
+                <a:cs typeface="+mn-cs"/>
+              </a:defRPr>
+            </a:lvl3pPr>
+            <a:lvl4pPr marL="1600200" indent="-228600" algn="l" defTabSz="914400" rtl="0" eaLnBrk="1" latinLnBrk="0" hangingPunct="1">
+              <a:lnSpc>
+                <a:spcPct val="90000"/>
+              </a:lnSpc>
+              <a:spcBef>
+                <a:spcPts val="500"/>
+              </a:spcBef>
+              <a:buFont typeface="Arial" panose="020B0604020202020204" pitchFamily="34" charset="0"/>
+              <a:buChar char="•"/>
+              <a:defRPr sz="1800" kern="1200">
+                <a:solidFill>
+                  <a:schemeClr val="tx1"/>
+                </a:solidFill>
+                <a:latin typeface="+mn-lt"/>
+                <a:ea typeface="+mn-ea"/>
+                <a:cs typeface="+mn-cs"/>
+              </a:defRPr>
+            </a:lvl4pPr>
+            <a:lvl5pPr marL="2057400" indent="-228600" algn="l" defTabSz="914400" rtl="0" eaLnBrk="1" latinLnBrk="0" hangingPunct="1">
+              <a:lnSpc>
+                <a:spcPct val="90000"/>
+              </a:lnSpc>
+              <a:spcBef>
+                <a:spcPts val="500"/>
+              </a:spcBef>
+              <a:buFont typeface="Arial" panose="020B0604020202020204" pitchFamily="34" charset="0"/>
+              <a:buChar char="•"/>
+              <a:defRPr sz="1800" kern="1200">
+                <a:solidFill>
+                  <a:schemeClr val="tx1"/>
+                </a:solidFill>
+                <a:latin typeface="+mn-lt"/>
+                <a:ea typeface="+mn-ea"/>
+                <a:cs typeface="+mn-cs"/>
+              </a:defRPr>
+            </a:lvl5pPr>
+            <a:lvl6pPr marL="2514600" indent="-228600" algn="l" defTabSz="914400" rtl="0" eaLnBrk="1" latinLnBrk="0" hangingPunct="1">
+              <a:lnSpc>
+                <a:spcPct val="90000"/>
+              </a:lnSpc>
+              <a:spcBef>
+                <a:spcPts val="500"/>
+              </a:spcBef>
+              <a:buFont typeface="Arial" panose="020B0604020202020204" pitchFamily="34" charset="0"/>
+              <a:buChar char="•"/>
+              <a:defRPr sz="1800" kern="1200">
+                <a:solidFill>
+                  <a:schemeClr val="tx1"/>
+                </a:solidFill>
+                <a:latin typeface="+mn-lt"/>
+                <a:ea typeface="+mn-ea"/>
+                <a:cs typeface="+mn-cs"/>
+              </a:defRPr>
+            </a:lvl6pPr>
+            <a:lvl7pPr marL="2971800" indent="-228600" algn="l" defTabSz="914400" rtl="0" eaLnBrk="1" latinLnBrk="0" hangingPunct="1">
+              <a:lnSpc>
+                <a:spcPct val="90000"/>
+              </a:lnSpc>
+              <a:spcBef>
+                <a:spcPts val="500"/>
+              </a:spcBef>
+              <a:buFont typeface="Arial" panose="020B0604020202020204" pitchFamily="34" charset="0"/>
+              <a:buChar char="•"/>
+              <a:defRPr sz="1800" kern="1200">
+                <a:solidFill>
+                  <a:schemeClr val="tx1"/>
+                </a:solidFill>
+                <a:latin typeface="+mn-lt"/>
+                <a:ea typeface="+mn-ea"/>
+                <a:cs typeface="+mn-cs"/>
+              </a:defRPr>
+            </a:lvl7pPr>
+            <a:lvl8pPr marL="3429000" indent="-228600" algn="l" defTabSz="914400" rtl="0" eaLnBrk="1" latinLnBrk="0" hangingPunct="1">
+              <a:lnSpc>
+                <a:spcPct val="90000"/>
+              </a:lnSpc>
+              <a:spcBef>
+                <a:spcPts val="500"/>
+              </a:spcBef>
+              <a:buFont typeface="Arial" panose="020B0604020202020204" pitchFamily="34" charset="0"/>
+              <a:buChar char="•"/>
+              <a:defRPr sz="1800" kern="1200">
+                <a:solidFill>
+                  <a:schemeClr val="tx1"/>
+                </a:solidFill>
+                <a:latin typeface="+mn-lt"/>
+                <a:ea typeface="+mn-ea"/>
+                <a:cs typeface="+mn-cs"/>
+              </a:defRPr>
+            </a:lvl8pPr>
+            <a:lvl9pPr marL="3886200" indent="-228600" algn="l" defTabSz="914400" rtl="0" eaLnBrk="1" latinLnBrk="0" hangingPunct="1">
+              <a:lnSpc>
+                <a:spcPct val="90000"/>
+              </a:lnSpc>
+              <a:spcBef>
+                <a:spcPts val="500"/>
+              </a:spcBef>
+              <a:buFont typeface="Arial" panose="020B0604020202020204" pitchFamily="34" charset="0"/>
+              <a:buChar char="•"/>
+              <a:defRPr sz="1800" kern="1200">
+                <a:solidFill>
+                  <a:schemeClr val="tx1"/>
+                </a:solidFill>
+                <a:latin typeface="+mn-lt"/>
+                <a:ea typeface="+mn-ea"/>
+                <a:cs typeface="+mn-cs"/>
+              </a:defRPr>
+            </a:lvl9pPr>
+          </a:lstStyle>
+          <a:p>
+            <a:pPr marL="0" indent="0">
+              <a:buNone/>
+            </a:pPr>
+            <a:r>
+              <a:rPr lang="en-US" sz="2400" b="1" dirty="0"/>
+              <a:t>20- </a:t>
+            </a:r>
+            <a:r>
+              <a:rPr lang="en-US" sz="2400" b="1" dirty="0" err="1"/>
+              <a:t>Insertar</a:t>
+            </a:r>
+            <a:r>
+              <a:rPr lang="en-US" sz="2400" b="1" dirty="0"/>
+              <a:t> </a:t>
+            </a:r>
+            <a:r>
+              <a:rPr lang="en-US" sz="2400" b="1" dirty="0" err="1"/>
+              <a:t>una</a:t>
+            </a:r>
+            <a:r>
+              <a:rPr lang="en-US" sz="2400" b="1" dirty="0"/>
+              <a:t> </a:t>
+            </a:r>
+            <a:r>
+              <a:rPr lang="en-US" sz="2400" b="1" dirty="0" err="1"/>
+              <a:t>grafica</a:t>
+            </a:r>
+            <a:r>
+              <a:rPr lang="en-US" sz="2400" b="1" dirty="0"/>
+              <a:t> de barras con </a:t>
+            </a:r>
+            <a:r>
+              <a:rPr lang="en-US" sz="2400" b="1" dirty="0" err="1"/>
+              <a:t>lineas</a:t>
+            </a:r>
+            <a:r>
+              <a:rPr lang="en-US" sz="2400" b="1" dirty="0"/>
+              <a:t> </a:t>
+            </a:r>
+            <a:r>
+              <a:rPr lang="en-US" sz="2400" b="1" dirty="0" err="1"/>
+              <a:t>colocando</a:t>
+            </a:r>
+            <a:r>
+              <a:rPr lang="en-US" sz="2400" b="1" dirty="0"/>
+              <a:t> los campos de la imagen</a:t>
+            </a:r>
+          </a:p>
+        </p:txBody>
+      </p:sp>
+      <p:sp>
+        <p:nvSpPr>
+          <p:cNvPr id="14" name="Content Placeholder 2">
+            <a:extLst>
+              <a:ext uri="{FF2B5EF4-FFF2-40B4-BE49-F238E27FC236}">
+                <a16:creationId xmlns:a16="http://schemas.microsoft.com/office/drawing/2014/main" id="{84FAA683-1186-BEAA-BBE6-7572C5BBCC89}"/>
+              </a:ext>
+            </a:extLst>
+          </p:cNvPr>
+          <p:cNvSpPr txBox="1">
+            <a:spLocks/>
+          </p:cNvSpPr>
+          <p:nvPr/>
+        </p:nvSpPr>
+        <p:spPr>
+          <a:xfrm>
+            <a:off x="6859682" y="233781"/>
+            <a:ext cx="4915301" cy="1322982"/>
+          </a:xfrm>
+          <a:prstGeom prst="rect">
+            <a:avLst/>
+          </a:prstGeom>
+        </p:spPr>
+        <p:txBody>
+          <a:bodyPr vert="horz" lIns="91440" tIns="45720" rIns="91440" bIns="45720" rtlCol="0">
+            <a:normAutofit/>
+          </a:bodyPr>
+          <a:lstStyle>
+            <a:lvl1pPr marL="228600" indent="-228600" algn="l" defTabSz="914400" rtl="0" eaLnBrk="1" latinLnBrk="0" hangingPunct="1">
+              <a:lnSpc>
+                <a:spcPct val="90000"/>
+              </a:lnSpc>
+              <a:spcBef>
+                <a:spcPts val="1000"/>
+              </a:spcBef>
+              <a:buFont typeface="Arial" panose="020B0604020202020204" pitchFamily="34" charset="0"/>
+              <a:buChar char="•"/>
+              <a:defRPr sz="2800" kern="1200">
+                <a:solidFill>
+                  <a:schemeClr val="tx1"/>
+                </a:solidFill>
+                <a:latin typeface="+mn-lt"/>
+                <a:ea typeface="+mn-ea"/>
+                <a:cs typeface="+mn-cs"/>
+              </a:defRPr>
+            </a:lvl1pPr>
+            <a:lvl2pPr marL="685800" indent="-228600" algn="l" defTabSz="914400" rtl="0" eaLnBrk="1" latinLnBrk="0" hangingPunct="1">
+              <a:lnSpc>
+                <a:spcPct val="90000"/>
+              </a:lnSpc>
+              <a:spcBef>
+                <a:spcPts val="500"/>
+              </a:spcBef>
+              <a:buFont typeface="Arial" panose="020B0604020202020204" pitchFamily="34" charset="0"/>
+              <a:buChar char="•"/>
+              <a:defRPr sz="2400" kern="1200">
+                <a:solidFill>
+                  <a:schemeClr val="tx1"/>
+                </a:solidFill>
+                <a:latin typeface="+mn-lt"/>
+                <a:ea typeface="+mn-ea"/>
+                <a:cs typeface="+mn-cs"/>
+              </a:defRPr>
+            </a:lvl2pPr>
+            <a:lvl3pPr marL="1143000" indent="-228600" algn="l" defTabSz="914400" rtl="0" eaLnBrk="1" latinLnBrk="0" hangingPunct="1">
+              <a:lnSpc>
+                <a:spcPct val="90000"/>
+              </a:lnSpc>
+              <a:spcBef>
+                <a:spcPts val="500"/>
+              </a:spcBef>
+              <a:buFont typeface="Arial" panose="020B0604020202020204" pitchFamily="34" charset="0"/>
+              <a:buChar char="•"/>
+              <a:defRPr sz="2000" kern="1200">
+                <a:solidFill>
+                  <a:schemeClr val="tx1"/>
+                </a:solidFill>
+                <a:latin typeface="+mn-lt"/>
+                <a:ea typeface="+mn-ea"/>
+                <a:cs typeface="+mn-cs"/>
+              </a:defRPr>
+            </a:lvl3pPr>
+            <a:lvl4pPr marL="1600200" indent="-228600" algn="l" defTabSz="914400" rtl="0" eaLnBrk="1" latinLnBrk="0" hangingPunct="1">
+              <a:lnSpc>
+                <a:spcPct val="90000"/>
+              </a:lnSpc>
+              <a:spcBef>
+                <a:spcPts val="500"/>
+              </a:spcBef>
+              <a:buFont typeface="Arial" panose="020B0604020202020204" pitchFamily="34" charset="0"/>
+              <a:buChar char="•"/>
+              <a:defRPr sz="1800" kern="1200">
+                <a:solidFill>
+                  <a:schemeClr val="tx1"/>
+                </a:solidFill>
+                <a:latin typeface="+mn-lt"/>
+                <a:ea typeface="+mn-ea"/>
+                <a:cs typeface="+mn-cs"/>
+              </a:defRPr>
+            </a:lvl4pPr>
+            <a:lvl5pPr marL="2057400" indent="-228600" algn="l" defTabSz="914400" rtl="0" eaLnBrk="1" latinLnBrk="0" hangingPunct="1">
+              <a:lnSpc>
+                <a:spcPct val="90000"/>
+              </a:lnSpc>
+              <a:spcBef>
+                <a:spcPts val="500"/>
+              </a:spcBef>
+              <a:buFont typeface="Arial" panose="020B0604020202020204" pitchFamily="34" charset="0"/>
+              <a:buChar char="•"/>
+              <a:defRPr sz="1800" kern="1200">
+                <a:solidFill>
+                  <a:schemeClr val="tx1"/>
+                </a:solidFill>
+                <a:latin typeface="+mn-lt"/>
+                <a:ea typeface="+mn-ea"/>
+                <a:cs typeface="+mn-cs"/>
+              </a:defRPr>
+            </a:lvl5pPr>
+            <a:lvl6pPr marL="2514600" indent="-228600" algn="l" defTabSz="914400" rtl="0" eaLnBrk="1" latinLnBrk="0" hangingPunct="1">
+              <a:lnSpc>
+                <a:spcPct val="90000"/>
+              </a:lnSpc>
+              <a:spcBef>
+                <a:spcPts val="500"/>
+              </a:spcBef>
+              <a:buFont typeface="Arial" panose="020B0604020202020204" pitchFamily="34" charset="0"/>
+              <a:buChar char="•"/>
+              <a:defRPr sz="1800" kern="1200">
+                <a:solidFill>
+                  <a:schemeClr val="tx1"/>
+                </a:solidFill>
+                <a:latin typeface="+mn-lt"/>
+                <a:ea typeface="+mn-ea"/>
+                <a:cs typeface="+mn-cs"/>
+              </a:defRPr>
+            </a:lvl6pPr>
+            <a:lvl7pPr marL="2971800" indent="-228600" algn="l" defTabSz="914400" rtl="0" eaLnBrk="1" latinLnBrk="0" hangingPunct="1">
+              <a:lnSpc>
+                <a:spcPct val="90000"/>
+              </a:lnSpc>
+              <a:spcBef>
+                <a:spcPts val="500"/>
+              </a:spcBef>
+              <a:buFont typeface="Arial" panose="020B0604020202020204" pitchFamily="34" charset="0"/>
+              <a:buChar char="•"/>
+              <a:defRPr sz="1800" kern="1200">
+                <a:solidFill>
+                  <a:schemeClr val="tx1"/>
+                </a:solidFill>
+                <a:latin typeface="+mn-lt"/>
+                <a:ea typeface="+mn-ea"/>
+                <a:cs typeface="+mn-cs"/>
+              </a:defRPr>
+            </a:lvl7pPr>
+            <a:lvl8pPr marL="3429000" indent="-228600" algn="l" defTabSz="914400" rtl="0" eaLnBrk="1" latinLnBrk="0" hangingPunct="1">
+              <a:lnSpc>
+                <a:spcPct val="90000"/>
+              </a:lnSpc>
+              <a:spcBef>
+                <a:spcPts val="500"/>
+              </a:spcBef>
+              <a:buFont typeface="Arial" panose="020B0604020202020204" pitchFamily="34" charset="0"/>
+              <a:buChar char="•"/>
+              <a:defRPr sz="1800" kern="1200">
+                <a:solidFill>
+                  <a:schemeClr val="tx1"/>
+                </a:solidFill>
+                <a:latin typeface="+mn-lt"/>
+                <a:ea typeface="+mn-ea"/>
+                <a:cs typeface="+mn-cs"/>
+              </a:defRPr>
+            </a:lvl8pPr>
+            <a:lvl9pPr marL="3886200" indent="-228600" algn="l" defTabSz="914400" rtl="0" eaLnBrk="1" latinLnBrk="0" hangingPunct="1">
+              <a:lnSpc>
+                <a:spcPct val="90000"/>
+              </a:lnSpc>
+              <a:spcBef>
+                <a:spcPts val="500"/>
+              </a:spcBef>
+              <a:buFont typeface="Arial" panose="020B0604020202020204" pitchFamily="34" charset="0"/>
+              <a:buChar char="•"/>
+              <a:defRPr sz="1800" kern="1200">
+                <a:solidFill>
+                  <a:schemeClr val="tx1"/>
+                </a:solidFill>
+                <a:latin typeface="+mn-lt"/>
+                <a:ea typeface="+mn-ea"/>
+                <a:cs typeface="+mn-cs"/>
+              </a:defRPr>
+            </a:lvl9pPr>
+          </a:lstStyle>
+          <a:p>
+            <a:pPr marL="0" indent="0">
+              <a:buNone/>
+            </a:pPr>
+            <a:r>
+              <a:rPr lang="en-US" sz="2400" b="1" dirty="0"/>
+              <a:t>21- </a:t>
+            </a:r>
+            <a:r>
+              <a:rPr lang="en-US" sz="2400" b="1" dirty="0" err="1"/>
+              <a:t>crear</a:t>
+            </a:r>
+            <a:r>
+              <a:rPr lang="en-US" sz="2400" b="1" dirty="0"/>
+              <a:t> </a:t>
+            </a:r>
+            <a:r>
+              <a:rPr lang="en-US" sz="2400" b="1" dirty="0" err="1"/>
+              <a:t>una</a:t>
+            </a:r>
+            <a:r>
+              <a:rPr lang="en-US" sz="2400" b="1" dirty="0"/>
+              <a:t> </a:t>
+            </a:r>
+            <a:r>
+              <a:rPr lang="en-US" sz="2400" b="1" dirty="0" err="1"/>
+              <a:t>funcion</a:t>
+            </a:r>
+            <a:r>
+              <a:rPr lang="en-US" sz="2400" b="1" dirty="0"/>
+              <a:t> para que las barras </a:t>
+            </a:r>
+            <a:r>
+              <a:rPr lang="en-US" sz="2400" b="1" dirty="0" err="1"/>
+              <a:t>cambien</a:t>
+            </a:r>
+            <a:r>
+              <a:rPr lang="en-US" sz="2400" b="1" dirty="0"/>
+              <a:t> de color de </a:t>
+            </a:r>
+            <a:r>
+              <a:rPr lang="en-US" sz="2400" b="1" dirty="0" err="1"/>
+              <a:t>acuerdo</a:t>
+            </a:r>
+            <a:r>
+              <a:rPr lang="en-US" sz="2400" b="1" dirty="0"/>
+              <a:t> al valor </a:t>
+            </a:r>
+            <a:r>
+              <a:rPr lang="en-US" sz="2400" b="1" dirty="0" err="1"/>
+              <a:t>promedio</a:t>
+            </a:r>
+            <a:endParaRPr lang="en-US" sz="2400" b="1" dirty="0"/>
+          </a:p>
+        </p:txBody>
+      </p:sp>
+      <p:pic>
+        <p:nvPicPr>
+          <p:cNvPr id="16" name="Picture 15">
+            <a:extLst>
+              <a:ext uri="{FF2B5EF4-FFF2-40B4-BE49-F238E27FC236}">
+                <a16:creationId xmlns:a16="http://schemas.microsoft.com/office/drawing/2014/main" id="{C213CDA2-8BED-1AF7-C247-49DB6EEF476C}"/>
+              </a:ext>
+            </a:extLst>
+          </p:cNvPr>
+          <p:cNvPicPr>
+            <a:picLocks noChangeAspect="1"/>
+          </p:cNvPicPr>
+          <p:nvPr/>
+        </p:nvPicPr>
+        <p:blipFill>
+          <a:blip r:embed="rId5"/>
+          <a:stretch>
+            <a:fillRect/>
+          </a:stretch>
+        </p:blipFill>
+        <p:spPr>
+          <a:xfrm>
+            <a:off x="6949076" y="4596063"/>
+            <a:ext cx="4825907" cy="1836821"/>
+          </a:xfrm>
+          <a:prstGeom prst="rect">
+            <a:avLst/>
+          </a:prstGeom>
+        </p:spPr>
+      </p:pic>
+    </p:spTree>
+    <p:extLst>
+      <p:ext uri="{BB962C8B-B14F-4D97-AF65-F5344CB8AC3E}">
+        <p14:creationId xmlns:p14="http://schemas.microsoft.com/office/powerpoint/2010/main" val="4047406878"/>
+      </p:ext>
+    </p:extLst>
+  </p:cSld>
+  <p:clrMapOvr>
+    <a:masterClrMapping/>
+  </p:clrMapOvr>
+</p:sld>
+</file>
+
+<file path=ppt/slides/slide12.xml><?xml version="1.0" encoding="utf-8"?>
+<p:sld xmlns:a="http://schemas.openxmlformats.org/drawingml/2006/main" xmlns:r="http://schemas.openxmlformats.org/officeDocument/2006/relationships" xmlns:p="http://schemas.openxmlformats.org/presentationml/2006/main">
+  <p:cSld>
+    <p:spTree>
+      <p:nvGrpSpPr>
+        <p:cNvPr id="1" name="">
+          <a:extLst>
+            <a:ext uri="{FF2B5EF4-FFF2-40B4-BE49-F238E27FC236}">
+              <a16:creationId xmlns:a16="http://schemas.microsoft.com/office/drawing/2014/main" id="{89D471DB-2C09-587E-D9FD-0A94949303EE}"/>
+            </a:ext>
+          </a:extLst>
+        </p:cNvPr>
+        <p:cNvGrpSpPr/>
+        <p:nvPr/>
+      </p:nvGrpSpPr>
+      <p:grpSpPr>
+        <a:xfrm>
+          <a:off x="0" y="0"/>
+          <a:ext cx="0" cy="0"/>
+          <a:chOff x="0" y="0"/>
+          <a:chExt cx="0" cy="0"/>
+        </a:xfrm>
+      </p:grpSpPr>
+      <p:pic>
+        <p:nvPicPr>
+          <p:cNvPr id="3" name="Picture 2">
+            <a:extLst>
+              <a:ext uri="{FF2B5EF4-FFF2-40B4-BE49-F238E27FC236}">
+                <a16:creationId xmlns:a16="http://schemas.microsoft.com/office/drawing/2014/main" id="{4A15A578-90F8-396E-E50A-D04A9AF60437}"/>
+              </a:ext>
+            </a:extLst>
+          </p:cNvPr>
+          <p:cNvPicPr>
+            <a:picLocks noChangeAspect="1"/>
+          </p:cNvPicPr>
+          <p:nvPr/>
+        </p:nvPicPr>
+        <p:blipFill>
+          <a:blip r:embed="rId2"/>
+          <a:stretch>
+            <a:fillRect/>
+          </a:stretch>
+        </p:blipFill>
+        <p:spPr>
+          <a:xfrm>
+            <a:off x="6095999" y="1372669"/>
+            <a:ext cx="5125988" cy="2983450"/>
+          </a:xfrm>
+          <a:prstGeom prst="rect">
+            <a:avLst/>
+          </a:prstGeom>
+        </p:spPr>
+      </p:pic>
+      <p:pic>
+        <p:nvPicPr>
+          <p:cNvPr id="5" name="Picture 4">
+            <a:extLst>
+              <a:ext uri="{FF2B5EF4-FFF2-40B4-BE49-F238E27FC236}">
+                <a16:creationId xmlns:a16="http://schemas.microsoft.com/office/drawing/2014/main" id="{1025B7E8-1B5C-E47E-8733-E753B03B546A}"/>
+              </a:ext>
+            </a:extLst>
+          </p:cNvPr>
+          <p:cNvPicPr>
+            <a:picLocks noChangeAspect="1"/>
+          </p:cNvPicPr>
+          <p:nvPr/>
+        </p:nvPicPr>
+        <p:blipFill>
+          <a:blip r:embed="rId3"/>
+          <a:stretch>
+            <a:fillRect/>
+          </a:stretch>
+        </p:blipFill>
+        <p:spPr>
+          <a:xfrm>
+            <a:off x="506288" y="984475"/>
+            <a:ext cx="4568948" cy="1732870"/>
+          </a:xfrm>
+          <a:prstGeom prst="rect">
+            <a:avLst/>
+          </a:prstGeom>
+        </p:spPr>
+      </p:pic>
+      <p:pic>
+        <p:nvPicPr>
+          <p:cNvPr id="9" name="Picture 8">
+            <a:extLst>
+              <a:ext uri="{FF2B5EF4-FFF2-40B4-BE49-F238E27FC236}">
+                <a16:creationId xmlns:a16="http://schemas.microsoft.com/office/drawing/2014/main" id="{25D96F0A-3E09-F38A-FFDE-4C9F4F959E8F}"/>
+              </a:ext>
+            </a:extLst>
+          </p:cNvPr>
+          <p:cNvPicPr>
+            <a:picLocks noChangeAspect="1"/>
+          </p:cNvPicPr>
+          <p:nvPr/>
+        </p:nvPicPr>
+        <p:blipFill>
+          <a:blip r:embed="rId4"/>
+          <a:stretch>
+            <a:fillRect/>
+          </a:stretch>
+        </p:blipFill>
+        <p:spPr>
+          <a:xfrm>
+            <a:off x="6592580" y="4265048"/>
+            <a:ext cx="3894157" cy="2225233"/>
+          </a:xfrm>
+          <a:prstGeom prst="rect">
+            <a:avLst/>
+          </a:prstGeom>
+        </p:spPr>
+      </p:pic>
+      <p:pic>
+        <p:nvPicPr>
+          <p:cNvPr id="15" name="Picture 14">
+            <a:extLst>
+              <a:ext uri="{FF2B5EF4-FFF2-40B4-BE49-F238E27FC236}">
+                <a16:creationId xmlns:a16="http://schemas.microsoft.com/office/drawing/2014/main" id="{715EC992-C871-D6DD-D482-D1E2468D5435}"/>
+              </a:ext>
+            </a:extLst>
+          </p:cNvPr>
+          <p:cNvPicPr>
+            <a:picLocks noChangeAspect="1"/>
+          </p:cNvPicPr>
+          <p:nvPr/>
+        </p:nvPicPr>
+        <p:blipFill>
+          <a:blip r:embed="rId5"/>
+          <a:srcRect l="57410" b="16889"/>
+          <a:stretch/>
+        </p:blipFill>
+        <p:spPr>
+          <a:xfrm>
+            <a:off x="721359" y="4184833"/>
+            <a:ext cx="2141591" cy="2279484"/>
+          </a:xfrm>
+          <a:prstGeom prst="rect">
+            <a:avLst/>
+          </a:prstGeom>
+        </p:spPr>
+      </p:pic>
+      <p:sp>
+        <p:nvSpPr>
+          <p:cNvPr id="17" name="Rectangle 16">
+            <a:extLst>
+              <a:ext uri="{FF2B5EF4-FFF2-40B4-BE49-F238E27FC236}">
+                <a16:creationId xmlns:a16="http://schemas.microsoft.com/office/drawing/2014/main" id="{D308398E-6433-2206-73FF-A1D47D600A5D}"/>
+              </a:ext>
+            </a:extLst>
+          </p:cNvPr>
+          <p:cNvSpPr/>
+          <p:nvPr/>
+        </p:nvSpPr>
+        <p:spPr>
+          <a:xfrm>
+            <a:off x="2238703" y="6198249"/>
+            <a:ext cx="378882" cy="266068"/>
+          </a:xfrm>
+          <a:prstGeom prst="rect">
+            <a:avLst/>
+          </a:prstGeom>
+          <a:noFill/>
+          <a:ln w="28575">
+            <a:solidFill>
+              <a:srgbClr val="FF0000"/>
+            </a:solidFill>
+          </a:ln>
+        </p:spPr>
+        <p:style>
+          <a:lnRef idx="2">
+            <a:schemeClr val="accent1">
+              <a:shade val="15000"/>
+            </a:schemeClr>
+          </a:lnRef>
+          <a:fillRef idx="1">
+            <a:schemeClr val="accent1"/>
+          </a:fillRef>
+          <a:effectRef idx="0">
+            <a:schemeClr val="accent1"/>
+          </a:effectRef>
+          <a:fontRef idx="minor">
+            <a:schemeClr val="lt1"/>
+          </a:fontRef>
+        </p:style>
+        <p:txBody>
+          <a:bodyPr rtlCol="0" anchor="ctr"/>
+          <a:lstStyle/>
+          <a:p>
+            <a:pPr algn="ctr"/>
+            <a:endParaRPr lang="en-US"/>
+          </a:p>
+        </p:txBody>
+      </p:sp>
+      <p:sp>
+        <p:nvSpPr>
+          <p:cNvPr id="18" name="Rectangle 17">
+            <a:extLst>
+              <a:ext uri="{FF2B5EF4-FFF2-40B4-BE49-F238E27FC236}">
+                <a16:creationId xmlns:a16="http://schemas.microsoft.com/office/drawing/2014/main" id="{70C497E8-F9EF-2D9E-764F-ACA3770B12ED}"/>
+              </a:ext>
+            </a:extLst>
+          </p:cNvPr>
+          <p:cNvSpPr/>
+          <p:nvPr/>
+        </p:nvSpPr>
+        <p:spPr>
+          <a:xfrm>
+            <a:off x="755830" y="4866492"/>
+            <a:ext cx="1678150" cy="266068"/>
+          </a:xfrm>
+          <a:prstGeom prst="rect">
+            <a:avLst/>
+          </a:prstGeom>
+          <a:noFill/>
+          <a:ln w="28575">
+            <a:solidFill>
+              <a:srgbClr val="FF0000"/>
+            </a:solidFill>
+          </a:ln>
+        </p:spPr>
+        <p:style>
+          <a:lnRef idx="2">
+            <a:schemeClr val="accent1">
+              <a:shade val="15000"/>
+            </a:schemeClr>
+          </a:lnRef>
+          <a:fillRef idx="1">
+            <a:schemeClr val="accent1"/>
+          </a:fillRef>
+          <a:effectRef idx="0">
+            <a:schemeClr val="accent1"/>
+          </a:effectRef>
+          <a:fontRef idx="minor">
+            <a:schemeClr val="lt1"/>
+          </a:fontRef>
+        </p:style>
+        <p:txBody>
+          <a:bodyPr rtlCol="0" anchor="ctr"/>
+          <a:lstStyle/>
+          <a:p>
+            <a:pPr algn="ctr"/>
+            <a:endParaRPr lang="en-US"/>
+          </a:p>
+        </p:txBody>
+      </p:sp>
+      <p:sp>
+        <p:nvSpPr>
+          <p:cNvPr id="19" name="Rectangle 18">
+            <a:extLst>
+              <a:ext uri="{FF2B5EF4-FFF2-40B4-BE49-F238E27FC236}">
+                <a16:creationId xmlns:a16="http://schemas.microsoft.com/office/drawing/2014/main" id="{03840EDD-F87B-9E12-86C5-6AACD5EAAF66}"/>
+              </a:ext>
+            </a:extLst>
+          </p:cNvPr>
+          <p:cNvSpPr/>
+          <p:nvPr/>
+        </p:nvSpPr>
+        <p:spPr>
+          <a:xfrm>
+            <a:off x="4716188" y="2307457"/>
+            <a:ext cx="378882" cy="266068"/>
+          </a:xfrm>
+          <a:prstGeom prst="rect">
+            <a:avLst/>
+          </a:prstGeom>
+          <a:noFill/>
+          <a:ln w="28575">
+            <a:solidFill>
+              <a:srgbClr val="FF0000"/>
+            </a:solidFill>
+          </a:ln>
+        </p:spPr>
+        <p:style>
+          <a:lnRef idx="2">
+            <a:schemeClr val="accent1">
+              <a:shade val="15000"/>
+            </a:schemeClr>
+          </a:lnRef>
+          <a:fillRef idx="1">
+            <a:schemeClr val="accent1"/>
+          </a:fillRef>
+          <a:effectRef idx="0">
+            <a:schemeClr val="accent1"/>
+          </a:effectRef>
+          <a:fontRef idx="minor">
+            <a:schemeClr val="lt1"/>
+          </a:fontRef>
+        </p:style>
+        <p:txBody>
+          <a:bodyPr rtlCol="0" anchor="ctr"/>
+          <a:lstStyle/>
+          <a:p>
+            <a:pPr algn="ctr"/>
+            <a:endParaRPr lang="en-US"/>
+          </a:p>
+        </p:txBody>
+      </p:sp>
+      <p:sp>
+        <p:nvSpPr>
+          <p:cNvPr id="20" name="Content Placeholder 2">
+            <a:extLst>
+              <a:ext uri="{FF2B5EF4-FFF2-40B4-BE49-F238E27FC236}">
+                <a16:creationId xmlns:a16="http://schemas.microsoft.com/office/drawing/2014/main" id="{B9B72550-1F47-D01D-AD32-FEC9FF42B19F}"/>
+              </a:ext>
+            </a:extLst>
+          </p:cNvPr>
+          <p:cNvSpPr txBox="1">
+            <a:spLocks/>
+          </p:cNvSpPr>
+          <p:nvPr/>
+        </p:nvSpPr>
+        <p:spPr>
+          <a:xfrm>
+            <a:off x="405300" y="239827"/>
+            <a:ext cx="4915301" cy="1322982"/>
+          </a:xfrm>
+          <a:prstGeom prst="rect">
+            <a:avLst/>
+          </a:prstGeom>
+        </p:spPr>
+        <p:txBody>
+          <a:bodyPr vert="horz" lIns="91440" tIns="45720" rIns="91440" bIns="45720" rtlCol="0">
+            <a:normAutofit/>
+          </a:bodyPr>
+          <a:lstStyle>
+            <a:lvl1pPr marL="228600" indent="-228600" algn="l" defTabSz="914400" rtl="0" eaLnBrk="1" latinLnBrk="0" hangingPunct="1">
+              <a:lnSpc>
+                <a:spcPct val="90000"/>
+              </a:lnSpc>
+              <a:spcBef>
+                <a:spcPts val="1000"/>
+              </a:spcBef>
+              <a:buFont typeface="Arial" panose="020B0604020202020204" pitchFamily="34" charset="0"/>
+              <a:buChar char="•"/>
+              <a:defRPr sz="2800" kern="1200">
+                <a:solidFill>
+                  <a:schemeClr val="tx1"/>
+                </a:solidFill>
+                <a:latin typeface="+mn-lt"/>
+                <a:ea typeface="+mn-ea"/>
+                <a:cs typeface="+mn-cs"/>
+              </a:defRPr>
+            </a:lvl1pPr>
+            <a:lvl2pPr marL="685800" indent="-228600" algn="l" defTabSz="914400" rtl="0" eaLnBrk="1" latinLnBrk="0" hangingPunct="1">
+              <a:lnSpc>
+                <a:spcPct val="90000"/>
+              </a:lnSpc>
+              <a:spcBef>
+                <a:spcPts val="500"/>
+              </a:spcBef>
+              <a:buFont typeface="Arial" panose="020B0604020202020204" pitchFamily="34" charset="0"/>
+              <a:buChar char="•"/>
+              <a:defRPr sz="2400" kern="1200">
+                <a:solidFill>
+                  <a:schemeClr val="tx1"/>
+                </a:solidFill>
+                <a:latin typeface="+mn-lt"/>
+                <a:ea typeface="+mn-ea"/>
+                <a:cs typeface="+mn-cs"/>
+              </a:defRPr>
+            </a:lvl2pPr>
+            <a:lvl3pPr marL="1143000" indent="-228600" algn="l" defTabSz="914400" rtl="0" eaLnBrk="1" latinLnBrk="0" hangingPunct="1">
+              <a:lnSpc>
+                <a:spcPct val="90000"/>
+              </a:lnSpc>
+              <a:spcBef>
+                <a:spcPts val="500"/>
+              </a:spcBef>
+              <a:buFont typeface="Arial" panose="020B0604020202020204" pitchFamily="34" charset="0"/>
+              <a:buChar char="•"/>
+              <a:defRPr sz="2000" kern="1200">
+                <a:solidFill>
+                  <a:schemeClr val="tx1"/>
+                </a:solidFill>
+                <a:latin typeface="+mn-lt"/>
+                <a:ea typeface="+mn-ea"/>
+                <a:cs typeface="+mn-cs"/>
+              </a:defRPr>
+            </a:lvl3pPr>
+            <a:lvl4pPr marL="1600200" indent="-228600" algn="l" defTabSz="914400" rtl="0" eaLnBrk="1" latinLnBrk="0" hangingPunct="1">
+              <a:lnSpc>
+                <a:spcPct val="90000"/>
+              </a:lnSpc>
+              <a:spcBef>
+                <a:spcPts val="500"/>
+              </a:spcBef>
+              <a:buFont typeface="Arial" panose="020B0604020202020204" pitchFamily="34" charset="0"/>
+              <a:buChar char="•"/>
+              <a:defRPr sz="1800" kern="1200">
+                <a:solidFill>
+                  <a:schemeClr val="tx1"/>
+                </a:solidFill>
+                <a:latin typeface="+mn-lt"/>
+                <a:ea typeface="+mn-ea"/>
+                <a:cs typeface="+mn-cs"/>
+              </a:defRPr>
+            </a:lvl4pPr>
+            <a:lvl5pPr marL="2057400" indent="-228600" algn="l" defTabSz="914400" rtl="0" eaLnBrk="1" latinLnBrk="0" hangingPunct="1">
+              <a:lnSpc>
+                <a:spcPct val="90000"/>
+              </a:lnSpc>
+              <a:spcBef>
+                <a:spcPts val="500"/>
+              </a:spcBef>
+              <a:buFont typeface="Arial" panose="020B0604020202020204" pitchFamily="34" charset="0"/>
+              <a:buChar char="•"/>
+              <a:defRPr sz="1800" kern="1200">
+                <a:solidFill>
+                  <a:schemeClr val="tx1"/>
+                </a:solidFill>
+                <a:latin typeface="+mn-lt"/>
+                <a:ea typeface="+mn-ea"/>
+                <a:cs typeface="+mn-cs"/>
+              </a:defRPr>
+            </a:lvl5pPr>
+            <a:lvl6pPr marL="2514600" indent="-228600" algn="l" defTabSz="914400" rtl="0" eaLnBrk="1" latinLnBrk="0" hangingPunct="1">
+              <a:lnSpc>
+                <a:spcPct val="90000"/>
+              </a:lnSpc>
+              <a:spcBef>
+                <a:spcPts val="500"/>
+              </a:spcBef>
+              <a:buFont typeface="Arial" panose="020B0604020202020204" pitchFamily="34" charset="0"/>
+              <a:buChar char="•"/>
+              <a:defRPr sz="1800" kern="1200">
+                <a:solidFill>
+                  <a:schemeClr val="tx1"/>
+                </a:solidFill>
+                <a:latin typeface="+mn-lt"/>
+                <a:ea typeface="+mn-ea"/>
+                <a:cs typeface="+mn-cs"/>
+              </a:defRPr>
+            </a:lvl6pPr>
+            <a:lvl7pPr marL="2971800" indent="-228600" algn="l" defTabSz="914400" rtl="0" eaLnBrk="1" latinLnBrk="0" hangingPunct="1">
+              <a:lnSpc>
+                <a:spcPct val="90000"/>
+              </a:lnSpc>
+              <a:spcBef>
+                <a:spcPts val="500"/>
+              </a:spcBef>
+              <a:buFont typeface="Arial" panose="020B0604020202020204" pitchFamily="34" charset="0"/>
+              <a:buChar char="•"/>
+              <a:defRPr sz="1800" kern="1200">
+                <a:solidFill>
+                  <a:schemeClr val="tx1"/>
+                </a:solidFill>
+                <a:latin typeface="+mn-lt"/>
+                <a:ea typeface="+mn-ea"/>
+                <a:cs typeface="+mn-cs"/>
+              </a:defRPr>
+            </a:lvl7pPr>
+            <a:lvl8pPr marL="3429000" indent="-228600" algn="l" defTabSz="914400" rtl="0" eaLnBrk="1" latinLnBrk="0" hangingPunct="1">
+              <a:lnSpc>
+                <a:spcPct val="90000"/>
+              </a:lnSpc>
+              <a:spcBef>
+                <a:spcPts val="500"/>
+              </a:spcBef>
+              <a:buFont typeface="Arial" panose="020B0604020202020204" pitchFamily="34" charset="0"/>
+              <a:buChar char="•"/>
+              <a:defRPr sz="1800" kern="1200">
+                <a:solidFill>
+                  <a:schemeClr val="tx1"/>
+                </a:solidFill>
+                <a:latin typeface="+mn-lt"/>
+                <a:ea typeface="+mn-ea"/>
+                <a:cs typeface="+mn-cs"/>
+              </a:defRPr>
+            </a:lvl8pPr>
+            <a:lvl9pPr marL="3886200" indent="-228600" algn="l" defTabSz="914400" rtl="0" eaLnBrk="1" latinLnBrk="0" hangingPunct="1">
+              <a:lnSpc>
+                <a:spcPct val="90000"/>
+              </a:lnSpc>
+              <a:spcBef>
+                <a:spcPts val="500"/>
+              </a:spcBef>
+              <a:buFont typeface="Arial" panose="020B0604020202020204" pitchFamily="34" charset="0"/>
+              <a:buChar char="•"/>
+              <a:defRPr sz="1800" kern="1200">
+                <a:solidFill>
+                  <a:schemeClr val="tx1"/>
+                </a:solidFill>
+                <a:latin typeface="+mn-lt"/>
+                <a:ea typeface="+mn-ea"/>
+                <a:cs typeface="+mn-cs"/>
+              </a:defRPr>
+            </a:lvl9pPr>
+          </a:lstStyle>
+          <a:p>
+            <a:pPr marL="0" indent="0">
+              <a:buNone/>
+            </a:pPr>
+            <a:r>
+              <a:rPr lang="en-US" sz="2400" b="1" dirty="0"/>
+              <a:t>22- </a:t>
+            </a:r>
+            <a:r>
+              <a:rPr lang="en-US" sz="2400" b="1" dirty="0" err="1"/>
+              <a:t>Colocar</a:t>
+            </a:r>
+            <a:r>
+              <a:rPr lang="en-US" sz="2400" b="1" dirty="0"/>
+              <a:t> </a:t>
+            </a:r>
+            <a:r>
+              <a:rPr lang="en-US" sz="2400" b="1" dirty="0" err="1"/>
+              <a:t>una</a:t>
+            </a:r>
+            <a:r>
+              <a:rPr lang="en-US" sz="2400" b="1" dirty="0"/>
+              <a:t> Matrix con los </a:t>
+            </a:r>
+            <a:r>
+              <a:rPr lang="en-US" sz="2400" b="1" dirty="0" err="1"/>
+              <a:t>siguientes</a:t>
+            </a:r>
+            <a:r>
+              <a:rPr lang="en-US" sz="2400" b="1" dirty="0"/>
+              <a:t> campos</a:t>
+            </a:r>
+          </a:p>
+        </p:txBody>
+      </p:sp>
+      <p:sp>
+        <p:nvSpPr>
+          <p:cNvPr id="21" name="Content Placeholder 2">
+            <a:extLst>
+              <a:ext uri="{FF2B5EF4-FFF2-40B4-BE49-F238E27FC236}">
+                <a16:creationId xmlns:a16="http://schemas.microsoft.com/office/drawing/2014/main" id="{7C58A9E1-22E2-37D5-D5AB-6112F38DA7D7}"/>
+              </a:ext>
+            </a:extLst>
+          </p:cNvPr>
+          <p:cNvSpPr txBox="1">
+            <a:spLocks/>
+          </p:cNvSpPr>
+          <p:nvPr/>
+        </p:nvSpPr>
+        <p:spPr>
+          <a:xfrm>
+            <a:off x="159935" y="2942066"/>
+            <a:ext cx="4915301" cy="1322982"/>
+          </a:xfrm>
+          <a:prstGeom prst="rect">
+            <a:avLst/>
+          </a:prstGeom>
+        </p:spPr>
+        <p:txBody>
+          <a:bodyPr vert="horz" lIns="91440" tIns="45720" rIns="91440" bIns="45720" rtlCol="0">
+            <a:normAutofit/>
+          </a:bodyPr>
+          <a:lstStyle>
+            <a:lvl1pPr marL="228600" indent="-228600" algn="l" defTabSz="914400" rtl="0" eaLnBrk="1" latinLnBrk="0" hangingPunct="1">
+              <a:lnSpc>
+                <a:spcPct val="90000"/>
+              </a:lnSpc>
+              <a:spcBef>
+                <a:spcPts val="1000"/>
+              </a:spcBef>
+              <a:buFont typeface="Arial" panose="020B0604020202020204" pitchFamily="34" charset="0"/>
+              <a:buChar char="•"/>
+              <a:defRPr sz="2800" kern="1200">
+                <a:solidFill>
+                  <a:schemeClr val="tx1"/>
+                </a:solidFill>
+                <a:latin typeface="+mn-lt"/>
+                <a:ea typeface="+mn-ea"/>
+                <a:cs typeface="+mn-cs"/>
+              </a:defRPr>
+            </a:lvl1pPr>
+            <a:lvl2pPr marL="685800" indent="-228600" algn="l" defTabSz="914400" rtl="0" eaLnBrk="1" latinLnBrk="0" hangingPunct="1">
+              <a:lnSpc>
+                <a:spcPct val="90000"/>
+              </a:lnSpc>
+              <a:spcBef>
+                <a:spcPts val="500"/>
+              </a:spcBef>
+              <a:buFont typeface="Arial" panose="020B0604020202020204" pitchFamily="34" charset="0"/>
+              <a:buChar char="•"/>
+              <a:defRPr sz="2400" kern="1200">
+                <a:solidFill>
+                  <a:schemeClr val="tx1"/>
+                </a:solidFill>
+                <a:latin typeface="+mn-lt"/>
+                <a:ea typeface="+mn-ea"/>
+                <a:cs typeface="+mn-cs"/>
+              </a:defRPr>
+            </a:lvl2pPr>
+            <a:lvl3pPr marL="1143000" indent="-228600" algn="l" defTabSz="914400" rtl="0" eaLnBrk="1" latinLnBrk="0" hangingPunct="1">
+              <a:lnSpc>
+                <a:spcPct val="90000"/>
+              </a:lnSpc>
+              <a:spcBef>
+                <a:spcPts val="500"/>
+              </a:spcBef>
+              <a:buFont typeface="Arial" panose="020B0604020202020204" pitchFamily="34" charset="0"/>
+              <a:buChar char="•"/>
+              <a:defRPr sz="2000" kern="1200">
+                <a:solidFill>
+                  <a:schemeClr val="tx1"/>
+                </a:solidFill>
+                <a:latin typeface="+mn-lt"/>
+                <a:ea typeface="+mn-ea"/>
+                <a:cs typeface="+mn-cs"/>
+              </a:defRPr>
+            </a:lvl3pPr>
+            <a:lvl4pPr marL="1600200" indent="-228600" algn="l" defTabSz="914400" rtl="0" eaLnBrk="1" latinLnBrk="0" hangingPunct="1">
+              <a:lnSpc>
+                <a:spcPct val="90000"/>
+              </a:lnSpc>
+              <a:spcBef>
+                <a:spcPts val="500"/>
+              </a:spcBef>
+              <a:buFont typeface="Arial" panose="020B0604020202020204" pitchFamily="34" charset="0"/>
+              <a:buChar char="•"/>
+              <a:defRPr sz="1800" kern="1200">
+                <a:solidFill>
+                  <a:schemeClr val="tx1"/>
+                </a:solidFill>
+                <a:latin typeface="+mn-lt"/>
+                <a:ea typeface="+mn-ea"/>
+                <a:cs typeface="+mn-cs"/>
+              </a:defRPr>
+            </a:lvl4pPr>
+            <a:lvl5pPr marL="2057400" indent="-228600" algn="l" defTabSz="914400" rtl="0" eaLnBrk="1" latinLnBrk="0" hangingPunct="1">
+              <a:lnSpc>
+                <a:spcPct val="90000"/>
+              </a:lnSpc>
+              <a:spcBef>
+                <a:spcPts val="500"/>
+              </a:spcBef>
+              <a:buFont typeface="Arial" panose="020B0604020202020204" pitchFamily="34" charset="0"/>
+              <a:buChar char="•"/>
+              <a:defRPr sz="1800" kern="1200">
+                <a:solidFill>
+                  <a:schemeClr val="tx1"/>
+                </a:solidFill>
+                <a:latin typeface="+mn-lt"/>
+                <a:ea typeface="+mn-ea"/>
+                <a:cs typeface="+mn-cs"/>
+              </a:defRPr>
+            </a:lvl5pPr>
+            <a:lvl6pPr marL="2514600" indent="-228600" algn="l" defTabSz="914400" rtl="0" eaLnBrk="1" latinLnBrk="0" hangingPunct="1">
+              <a:lnSpc>
+                <a:spcPct val="90000"/>
+              </a:lnSpc>
+              <a:spcBef>
+                <a:spcPts val="500"/>
+              </a:spcBef>
+              <a:buFont typeface="Arial" panose="020B0604020202020204" pitchFamily="34" charset="0"/>
+              <a:buChar char="•"/>
+              <a:defRPr sz="1800" kern="1200">
+                <a:solidFill>
+                  <a:schemeClr val="tx1"/>
+                </a:solidFill>
+                <a:latin typeface="+mn-lt"/>
+                <a:ea typeface="+mn-ea"/>
+                <a:cs typeface="+mn-cs"/>
+              </a:defRPr>
+            </a:lvl6pPr>
+            <a:lvl7pPr marL="2971800" indent="-228600" algn="l" defTabSz="914400" rtl="0" eaLnBrk="1" latinLnBrk="0" hangingPunct="1">
+              <a:lnSpc>
+                <a:spcPct val="90000"/>
+              </a:lnSpc>
+              <a:spcBef>
+                <a:spcPts val="500"/>
+              </a:spcBef>
+              <a:buFont typeface="Arial" panose="020B0604020202020204" pitchFamily="34" charset="0"/>
+              <a:buChar char="•"/>
+              <a:defRPr sz="1800" kern="1200">
+                <a:solidFill>
+                  <a:schemeClr val="tx1"/>
+                </a:solidFill>
+                <a:latin typeface="+mn-lt"/>
+                <a:ea typeface="+mn-ea"/>
+                <a:cs typeface="+mn-cs"/>
+              </a:defRPr>
+            </a:lvl7pPr>
+            <a:lvl8pPr marL="3429000" indent="-228600" algn="l" defTabSz="914400" rtl="0" eaLnBrk="1" latinLnBrk="0" hangingPunct="1">
+              <a:lnSpc>
+                <a:spcPct val="90000"/>
+              </a:lnSpc>
+              <a:spcBef>
+                <a:spcPts val="500"/>
+              </a:spcBef>
+              <a:buFont typeface="Arial" panose="020B0604020202020204" pitchFamily="34" charset="0"/>
+              <a:buChar char="•"/>
+              <a:defRPr sz="1800" kern="1200">
+                <a:solidFill>
+                  <a:schemeClr val="tx1"/>
+                </a:solidFill>
+                <a:latin typeface="+mn-lt"/>
+                <a:ea typeface="+mn-ea"/>
+                <a:cs typeface="+mn-cs"/>
+              </a:defRPr>
+            </a:lvl8pPr>
+            <a:lvl9pPr marL="3886200" indent="-228600" algn="l" defTabSz="914400" rtl="0" eaLnBrk="1" latinLnBrk="0" hangingPunct="1">
+              <a:lnSpc>
+                <a:spcPct val="90000"/>
+              </a:lnSpc>
+              <a:spcBef>
+                <a:spcPts val="500"/>
+              </a:spcBef>
+              <a:buFont typeface="Arial" panose="020B0604020202020204" pitchFamily="34" charset="0"/>
+              <a:buChar char="•"/>
+              <a:defRPr sz="1800" kern="1200">
+                <a:solidFill>
+                  <a:schemeClr val="tx1"/>
+                </a:solidFill>
+                <a:latin typeface="+mn-lt"/>
+                <a:ea typeface="+mn-ea"/>
+                <a:cs typeface="+mn-cs"/>
+              </a:defRPr>
+            </a:lvl9pPr>
+          </a:lstStyle>
+          <a:p>
+            <a:pPr marL="0" indent="0">
+              <a:buNone/>
+            </a:pPr>
+            <a:r>
+              <a:rPr lang="en-US" sz="2400" b="1" dirty="0"/>
+              <a:t>23- Click </a:t>
+            </a:r>
+            <a:r>
+              <a:rPr lang="en-US" sz="2400" b="1" dirty="0" err="1"/>
+              <a:t>en</a:t>
+            </a:r>
+            <a:r>
+              <a:rPr lang="en-US" sz="2400" b="1" dirty="0"/>
+              <a:t> el campo de [Count of folio] y </a:t>
+            </a:r>
+            <a:r>
+              <a:rPr lang="en-US" sz="2400" b="1" dirty="0" err="1"/>
+              <a:t>seleccionar</a:t>
+            </a:r>
+            <a:r>
+              <a:rPr lang="en-US" sz="2400" b="1" dirty="0"/>
+              <a:t> la </a:t>
+            </a:r>
+            <a:r>
+              <a:rPr lang="en-US" sz="2400" b="1" dirty="0" err="1"/>
+              <a:t>opcion</a:t>
+            </a:r>
+            <a:r>
+              <a:rPr lang="en-US" sz="2400" b="1" dirty="0"/>
+              <a:t> de (Conditional formatting)</a:t>
+            </a:r>
+          </a:p>
+        </p:txBody>
+      </p:sp>
+      <p:sp>
+        <p:nvSpPr>
+          <p:cNvPr id="22" name="Content Placeholder 2">
+            <a:extLst>
+              <a:ext uri="{FF2B5EF4-FFF2-40B4-BE49-F238E27FC236}">
+                <a16:creationId xmlns:a16="http://schemas.microsoft.com/office/drawing/2014/main" id="{F9F8FB3D-7194-8CA4-7BE1-5C3A4777C343}"/>
+              </a:ext>
+            </a:extLst>
+          </p:cNvPr>
+          <p:cNvSpPr txBox="1">
+            <a:spLocks/>
+          </p:cNvSpPr>
+          <p:nvPr/>
+        </p:nvSpPr>
+        <p:spPr>
+          <a:xfrm>
+            <a:off x="6201343" y="49687"/>
+            <a:ext cx="4915301" cy="1322982"/>
+          </a:xfrm>
+          <a:prstGeom prst="rect">
+            <a:avLst/>
+          </a:prstGeom>
+        </p:spPr>
+        <p:txBody>
+          <a:bodyPr vert="horz" lIns="91440" tIns="45720" rIns="91440" bIns="45720" rtlCol="0">
+            <a:normAutofit lnSpcReduction="10000"/>
+          </a:bodyPr>
+          <a:lstStyle>
+            <a:lvl1pPr marL="228600" indent="-228600" algn="l" defTabSz="914400" rtl="0" eaLnBrk="1" latinLnBrk="0" hangingPunct="1">
+              <a:lnSpc>
+                <a:spcPct val="90000"/>
+              </a:lnSpc>
+              <a:spcBef>
+                <a:spcPts val="1000"/>
+              </a:spcBef>
+              <a:buFont typeface="Arial" panose="020B0604020202020204" pitchFamily="34" charset="0"/>
+              <a:buChar char="•"/>
+              <a:defRPr sz="2800" kern="1200">
+                <a:solidFill>
+                  <a:schemeClr val="tx1"/>
+                </a:solidFill>
+                <a:latin typeface="+mn-lt"/>
+                <a:ea typeface="+mn-ea"/>
+                <a:cs typeface="+mn-cs"/>
+              </a:defRPr>
+            </a:lvl1pPr>
+            <a:lvl2pPr marL="685800" indent="-228600" algn="l" defTabSz="914400" rtl="0" eaLnBrk="1" latinLnBrk="0" hangingPunct="1">
+              <a:lnSpc>
+                <a:spcPct val="90000"/>
+              </a:lnSpc>
+              <a:spcBef>
+                <a:spcPts val="500"/>
+              </a:spcBef>
+              <a:buFont typeface="Arial" panose="020B0604020202020204" pitchFamily="34" charset="0"/>
+              <a:buChar char="•"/>
+              <a:defRPr sz="2400" kern="1200">
+                <a:solidFill>
+                  <a:schemeClr val="tx1"/>
+                </a:solidFill>
+                <a:latin typeface="+mn-lt"/>
+                <a:ea typeface="+mn-ea"/>
+                <a:cs typeface="+mn-cs"/>
+              </a:defRPr>
+            </a:lvl2pPr>
+            <a:lvl3pPr marL="1143000" indent="-228600" algn="l" defTabSz="914400" rtl="0" eaLnBrk="1" latinLnBrk="0" hangingPunct="1">
+              <a:lnSpc>
+                <a:spcPct val="90000"/>
+              </a:lnSpc>
+              <a:spcBef>
+                <a:spcPts val="500"/>
+              </a:spcBef>
+              <a:buFont typeface="Arial" panose="020B0604020202020204" pitchFamily="34" charset="0"/>
+              <a:buChar char="•"/>
+              <a:defRPr sz="2000" kern="1200">
+                <a:solidFill>
+                  <a:schemeClr val="tx1"/>
+                </a:solidFill>
+                <a:latin typeface="+mn-lt"/>
+                <a:ea typeface="+mn-ea"/>
+                <a:cs typeface="+mn-cs"/>
+              </a:defRPr>
+            </a:lvl3pPr>
+            <a:lvl4pPr marL="1600200" indent="-228600" algn="l" defTabSz="914400" rtl="0" eaLnBrk="1" latinLnBrk="0" hangingPunct="1">
+              <a:lnSpc>
+                <a:spcPct val="90000"/>
+              </a:lnSpc>
+              <a:spcBef>
+                <a:spcPts val="500"/>
+              </a:spcBef>
+              <a:buFont typeface="Arial" panose="020B0604020202020204" pitchFamily="34" charset="0"/>
+              <a:buChar char="•"/>
+              <a:defRPr sz="1800" kern="1200">
+                <a:solidFill>
+                  <a:schemeClr val="tx1"/>
+                </a:solidFill>
+                <a:latin typeface="+mn-lt"/>
+                <a:ea typeface="+mn-ea"/>
+                <a:cs typeface="+mn-cs"/>
+              </a:defRPr>
+            </a:lvl4pPr>
+            <a:lvl5pPr marL="2057400" indent="-228600" algn="l" defTabSz="914400" rtl="0" eaLnBrk="1" latinLnBrk="0" hangingPunct="1">
+              <a:lnSpc>
+                <a:spcPct val="90000"/>
+              </a:lnSpc>
+              <a:spcBef>
+                <a:spcPts val="500"/>
+              </a:spcBef>
+              <a:buFont typeface="Arial" panose="020B0604020202020204" pitchFamily="34" charset="0"/>
+              <a:buChar char="•"/>
+              <a:defRPr sz="1800" kern="1200">
+                <a:solidFill>
+                  <a:schemeClr val="tx1"/>
+                </a:solidFill>
+                <a:latin typeface="+mn-lt"/>
+                <a:ea typeface="+mn-ea"/>
+                <a:cs typeface="+mn-cs"/>
+              </a:defRPr>
+            </a:lvl5pPr>
+            <a:lvl6pPr marL="2514600" indent="-228600" algn="l" defTabSz="914400" rtl="0" eaLnBrk="1" latinLnBrk="0" hangingPunct="1">
+              <a:lnSpc>
+                <a:spcPct val="90000"/>
+              </a:lnSpc>
+              <a:spcBef>
+                <a:spcPts val="500"/>
+              </a:spcBef>
+              <a:buFont typeface="Arial" panose="020B0604020202020204" pitchFamily="34" charset="0"/>
+              <a:buChar char="•"/>
+              <a:defRPr sz="1800" kern="1200">
+                <a:solidFill>
+                  <a:schemeClr val="tx1"/>
+                </a:solidFill>
+                <a:latin typeface="+mn-lt"/>
+                <a:ea typeface="+mn-ea"/>
+                <a:cs typeface="+mn-cs"/>
+              </a:defRPr>
+            </a:lvl6pPr>
+            <a:lvl7pPr marL="2971800" indent="-228600" algn="l" defTabSz="914400" rtl="0" eaLnBrk="1" latinLnBrk="0" hangingPunct="1">
+              <a:lnSpc>
+                <a:spcPct val="90000"/>
+              </a:lnSpc>
+              <a:spcBef>
+                <a:spcPts val="500"/>
+              </a:spcBef>
+              <a:buFont typeface="Arial" panose="020B0604020202020204" pitchFamily="34" charset="0"/>
+              <a:buChar char="•"/>
+              <a:defRPr sz="1800" kern="1200">
+                <a:solidFill>
+                  <a:schemeClr val="tx1"/>
+                </a:solidFill>
+                <a:latin typeface="+mn-lt"/>
+                <a:ea typeface="+mn-ea"/>
+                <a:cs typeface="+mn-cs"/>
+              </a:defRPr>
+            </a:lvl7pPr>
+            <a:lvl8pPr marL="3429000" indent="-228600" algn="l" defTabSz="914400" rtl="0" eaLnBrk="1" latinLnBrk="0" hangingPunct="1">
+              <a:lnSpc>
+                <a:spcPct val="90000"/>
+              </a:lnSpc>
+              <a:spcBef>
+                <a:spcPts val="500"/>
+              </a:spcBef>
+              <a:buFont typeface="Arial" panose="020B0604020202020204" pitchFamily="34" charset="0"/>
+              <a:buChar char="•"/>
+              <a:defRPr sz="1800" kern="1200">
+                <a:solidFill>
+                  <a:schemeClr val="tx1"/>
+                </a:solidFill>
+                <a:latin typeface="+mn-lt"/>
+                <a:ea typeface="+mn-ea"/>
+                <a:cs typeface="+mn-cs"/>
+              </a:defRPr>
+            </a:lvl8pPr>
+            <a:lvl9pPr marL="3886200" indent="-228600" algn="l" defTabSz="914400" rtl="0" eaLnBrk="1" latinLnBrk="0" hangingPunct="1">
+              <a:lnSpc>
+                <a:spcPct val="90000"/>
+              </a:lnSpc>
+              <a:spcBef>
+                <a:spcPts val="500"/>
+              </a:spcBef>
+              <a:buFont typeface="Arial" panose="020B0604020202020204" pitchFamily="34" charset="0"/>
+              <a:buChar char="•"/>
+              <a:defRPr sz="1800" kern="1200">
+                <a:solidFill>
+                  <a:schemeClr val="tx1"/>
+                </a:solidFill>
+                <a:latin typeface="+mn-lt"/>
+                <a:ea typeface="+mn-ea"/>
+                <a:cs typeface="+mn-cs"/>
+              </a:defRPr>
+            </a:lvl9pPr>
+          </a:lstStyle>
+          <a:p>
+            <a:pPr marL="0" indent="0">
+              <a:buNone/>
+            </a:pPr>
+            <a:r>
+              <a:rPr lang="en-US" sz="2400" b="1" dirty="0"/>
+              <a:t>24- </a:t>
+            </a:r>
+            <a:r>
+              <a:rPr lang="en-US" sz="2400" b="1" dirty="0" err="1"/>
+              <a:t>Colocar</a:t>
+            </a:r>
+            <a:r>
+              <a:rPr lang="en-US" sz="2400" b="1" dirty="0"/>
+              <a:t> los </a:t>
+            </a:r>
+            <a:r>
+              <a:rPr lang="en-US" sz="2400" b="1" dirty="0" err="1"/>
+              <a:t>siguientes</a:t>
+            </a:r>
+            <a:r>
+              <a:rPr lang="en-US" sz="2400" b="1" dirty="0"/>
+              <a:t> </a:t>
+            </a:r>
+            <a:r>
+              <a:rPr lang="en-US" sz="2400" b="1" dirty="0" err="1"/>
+              <a:t>degradados</a:t>
+            </a:r>
+            <a:r>
+              <a:rPr lang="en-US" sz="2400" b="1" dirty="0"/>
+              <a:t> para que el valor mas alto sea color mas </a:t>
+            </a:r>
+            <a:r>
+              <a:rPr lang="en-US" sz="2400" b="1" dirty="0" err="1"/>
+              <a:t>obscuro</a:t>
+            </a:r>
+            <a:r>
+              <a:rPr lang="en-US" sz="2400" b="1" dirty="0"/>
+              <a:t> y </a:t>
+            </a:r>
+            <a:r>
+              <a:rPr lang="en-US" sz="2400" b="1" dirty="0" err="1"/>
+              <a:t>mientras</a:t>
+            </a:r>
+            <a:r>
+              <a:rPr lang="en-US" sz="2400" b="1" dirty="0"/>
+              <a:t> mas bajo </a:t>
+            </a:r>
+            <a:r>
+              <a:rPr lang="en-US" sz="2400" b="1" dirty="0" err="1"/>
+              <a:t>blanco</a:t>
+            </a:r>
+            <a:endParaRPr lang="en-US" sz="2400" b="1" dirty="0"/>
+          </a:p>
+        </p:txBody>
+      </p:sp>
+    </p:spTree>
+    <p:extLst>
+      <p:ext uri="{BB962C8B-B14F-4D97-AF65-F5344CB8AC3E}">
+        <p14:creationId xmlns:p14="http://schemas.microsoft.com/office/powerpoint/2010/main" val="1429994312"/>
+      </p:ext>
+    </p:extLst>
+  </p:cSld>
+  <p:clrMapOvr>
+    <a:masterClrMapping/>
+  </p:clrMapOvr>
+</p:sld>
+</file>
+
 <file path=ppt/slides/slide2.xml><?xml version="1.0" encoding="utf-8"?>
 <p:sld xmlns:a="http://schemas.openxmlformats.org/drawingml/2006/main" xmlns:r="http://schemas.openxmlformats.org/officeDocument/2006/relationships" xmlns:p="http://schemas.openxmlformats.org/presentationml/2006/main">
   <p:cSld>
@@ -9579,22 +13024,53 @@
               <a:buNone/>
             </a:pPr>
             <a:r>
-              <a:rPr lang="en-US" sz="2400" b="1"/>
-              <a:t>14- Agregar un slicer con la columna </a:t>
-            </a:r>
-            <a:r>
-              <a:rPr lang="en-US" sz="2400" b="1">
+              <a:rPr lang="en-US" sz="2400" b="1" dirty="0"/>
+              <a:t>14- </a:t>
+            </a:r>
+            <a:r>
+              <a:rPr lang="en-US" sz="2400" b="1" dirty="0" err="1"/>
+              <a:t>Agregar</a:t>
+            </a:r>
+            <a:r>
+              <a:rPr lang="en-US" sz="2400" b="1" dirty="0"/>
+              <a:t> un slicer con la </a:t>
+            </a:r>
+            <a:r>
+              <a:rPr lang="en-US" sz="2400" b="1" dirty="0" err="1"/>
+              <a:t>columna</a:t>
+            </a:r>
+            <a:r>
+              <a:rPr lang="en-US" sz="2400" b="1" dirty="0"/>
+              <a:t> </a:t>
+            </a:r>
+            <a:r>
+              <a:rPr lang="en-US" sz="2400" b="1" dirty="0">
                 <a:solidFill>
                   <a:srgbClr val="0070C0"/>
                 </a:solidFill>
               </a:rPr>
-              <a:t>[Significado] </a:t>
-            </a:r>
-            <a:r>
-              <a:rPr lang="en-US" sz="2400" b="1"/>
+              <a:t>[</a:t>
+            </a:r>
+            <a:r>
+              <a:rPr lang="en-US" sz="2400" b="1" dirty="0" err="1">
+                <a:solidFill>
+                  <a:srgbClr val="0070C0"/>
+                </a:solidFill>
+              </a:rPr>
+              <a:t>Significado</a:t>
+            </a:r>
+            <a:r>
+              <a:rPr lang="en-US" sz="2400" b="1" dirty="0">
+                <a:solidFill>
+                  <a:srgbClr val="0070C0"/>
+                </a:solidFill>
+              </a:rPr>
+              <a:t>] </a:t>
+            </a:r>
+            <a:r>
+              <a:rPr lang="en-US" sz="2400" b="1" dirty="0"/>
               <a:t>de la table “Ref”</a:t>
             </a:r>
-            <a:endParaRPr lang="en-US" sz="2400" b="1" dirty="0"/>
           </a:p>
         </p:txBody>
       </p:sp>
@@ -9602,6 +13078,573 @@
     <p:extLst>
       <p:ext uri="{BB962C8B-B14F-4D97-AF65-F5344CB8AC3E}">
         <p14:creationId xmlns:p14="http://schemas.microsoft.com/office/powerpoint/2010/main" val="1507195232"/>
+      </p:ext>
+    </p:extLst>
+  </p:cSld>
+  <p:clrMapOvr>
+    <a:masterClrMapping/>
+  </p:clrMapOvr>
+</p:sld>
+</file>
+
+<file path=ppt/slides/slide9.xml><?xml version="1.0" encoding="utf-8"?>
+<p:sld xmlns:a="http://schemas.openxmlformats.org/drawingml/2006/main" xmlns:r="http://schemas.openxmlformats.org/officeDocument/2006/relationships" xmlns:p="http://schemas.openxmlformats.org/presentationml/2006/main">
+  <p:cSld>
+    <p:spTree>
+      <p:nvGrpSpPr>
+        <p:cNvPr id="1" name=""/>
+        <p:cNvGrpSpPr/>
+        <p:nvPr/>
+      </p:nvGrpSpPr>
+      <p:grpSpPr>
+        <a:xfrm>
+          <a:off x="0" y="0"/>
+          <a:ext cx="0" cy="0"/>
+          <a:chOff x="0" y="0"/>
+          <a:chExt cx="0" cy="0"/>
+        </a:xfrm>
+      </p:grpSpPr>
+      <p:pic>
+        <p:nvPicPr>
+          <p:cNvPr id="5" name="Picture 4">
+            <a:extLst>
+              <a:ext uri="{FF2B5EF4-FFF2-40B4-BE49-F238E27FC236}">
+                <a16:creationId xmlns:a16="http://schemas.microsoft.com/office/drawing/2014/main" id="{6C55379F-5BC1-3323-9B7A-CEE43215AA7B}"/>
+              </a:ext>
+            </a:extLst>
+          </p:cNvPr>
+          <p:cNvPicPr>
+            <a:picLocks noChangeAspect="1"/>
+          </p:cNvPicPr>
+          <p:nvPr/>
+        </p:nvPicPr>
+        <p:blipFill>
+          <a:blip r:embed="rId2"/>
+          <a:stretch>
+            <a:fillRect/>
+          </a:stretch>
+        </p:blipFill>
+        <p:spPr>
+          <a:xfrm>
+            <a:off x="6037313" y="2045713"/>
+            <a:ext cx="5608806" cy="4008467"/>
+          </a:xfrm>
+          <a:prstGeom prst="rect">
+            <a:avLst/>
+          </a:prstGeom>
+        </p:spPr>
+      </p:pic>
+      <p:sp>
+        <p:nvSpPr>
+          <p:cNvPr id="6" name="Content Placeholder 2">
+            <a:extLst>
+              <a:ext uri="{FF2B5EF4-FFF2-40B4-BE49-F238E27FC236}">
+                <a16:creationId xmlns:a16="http://schemas.microsoft.com/office/drawing/2014/main" id="{E31B3F6D-8FBC-1E55-3C08-C7A451FA3B3C}"/>
+              </a:ext>
+            </a:extLst>
+          </p:cNvPr>
+          <p:cNvSpPr txBox="1">
+            <a:spLocks/>
+          </p:cNvSpPr>
+          <p:nvPr/>
+        </p:nvSpPr>
+        <p:spPr>
+          <a:xfrm>
+            <a:off x="5173579" y="353418"/>
+            <a:ext cx="6849530" cy="1379053"/>
+          </a:xfrm>
+          <a:prstGeom prst="rect">
+            <a:avLst/>
+          </a:prstGeom>
+        </p:spPr>
+        <p:txBody>
+          <a:bodyPr vert="horz" lIns="91440" tIns="45720" rIns="91440" bIns="45720" rtlCol="0">
+            <a:normAutofit fontScale="92500" lnSpcReduction="20000"/>
+          </a:bodyPr>
+          <a:lstStyle>
+            <a:lvl1pPr marL="228600" indent="-228600" algn="l" defTabSz="914400" rtl="0" eaLnBrk="1" latinLnBrk="0" hangingPunct="1">
+              <a:lnSpc>
+                <a:spcPct val="90000"/>
+              </a:lnSpc>
+              <a:spcBef>
+                <a:spcPts val="1000"/>
+              </a:spcBef>
+              <a:buFont typeface="Arial" panose="020B0604020202020204" pitchFamily="34" charset="0"/>
+              <a:buChar char="•"/>
+              <a:defRPr sz="2800" kern="1200">
+                <a:solidFill>
+                  <a:schemeClr val="tx1"/>
+                </a:solidFill>
+                <a:latin typeface="+mn-lt"/>
+                <a:ea typeface="+mn-ea"/>
+                <a:cs typeface="+mn-cs"/>
+              </a:defRPr>
+            </a:lvl1pPr>
+            <a:lvl2pPr marL="685800" indent="-228600" algn="l" defTabSz="914400" rtl="0" eaLnBrk="1" latinLnBrk="0" hangingPunct="1">
+              <a:lnSpc>
+                <a:spcPct val="90000"/>
+              </a:lnSpc>
+              <a:spcBef>
+                <a:spcPts val="500"/>
+              </a:spcBef>
+              <a:buFont typeface="Arial" panose="020B0604020202020204" pitchFamily="34" charset="0"/>
+              <a:buChar char="•"/>
+              <a:defRPr sz="2400" kern="1200">
+                <a:solidFill>
+                  <a:schemeClr val="tx1"/>
+                </a:solidFill>
+                <a:latin typeface="+mn-lt"/>
+                <a:ea typeface="+mn-ea"/>
+                <a:cs typeface="+mn-cs"/>
+              </a:defRPr>
+            </a:lvl2pPr>
+            <a:lvl3pPr marL="1143000" indent="-228600" algn="l" defTabSz="914400" rtl="0" eaLnBrk="1" latinLnBrk="0" hangingPunct="1">
+              <a:lnSpc>
+                <a:spcPct val="90000"/>
+              </a:lnSpc>
+              <a:spcBef>
+                <a:spcPts val="500"/>
+              </a:spcBef>
+              <a:buFont typeface="Arial" panose="020B0604020202020204" pitchFamily="34" charset="0"/>
+              <a:buChar char="•"/>
+              <a:defRPr sz="2000" kern="1200">
+                <a:solidFill>
+                  <a:schemeClr val="tx1"/>
+                </a:solidFill>
+                <a:latin typeface="+mn-lt"/>
+                <a:ea typeface="+mn-ea"/>
+                <a:cs typeface="+mn-cs"/>
+              </a:defRPr>
+            </a:lvl3pPr>
+            <a:lvl4pPr marL="1600200" indent="-228600" algn="l" defTabSz="914400" rtl="0" eaLnBrk="1" latinLnBrk="0" hangingPunct="1">
+              <a:lnSpc>
+                <a:spcPct val="90000"/>
+              </a:lnSpc>
+              <a:spcBef>
+                <a:spcPts val="500"/>
+              </a:spcBef>
+              <a:buFont typeface="Arial" panose="020B0604020202020204" pitchFamily="34" charset="0"/>
+              <a:buChar char="•"/>
+              <a:defRPr sz="1800" kern="1200">
+                <a:solidFill>
+                  <a:schemeClr val="tx1"/>
+                </a:solidFill>
+                <a:latin typeface="+mn-lt"/>
+                <a:ea typeface="+mn-ea"/>
+                <a:cs typeface="+mn-cs"/>
+              </a:defRPr>
+            </a:lvl4pPr>
+            <a:lvl5pPr marL="2057400" indent="-228600" algn="l" defTabSz="914400" rtl="0" eaLnBrk="1" latinLnBrk="0" hangingPunct="1">
+              <a:lnSpc>
+                <a:spcPct val="90000"/>
+              </a:lnSpc>
+              <a:spcBef>
+                <a:spcPts val="500"/>
+              </a:spcBef>
+              <a:buFont typeface="Arial" panose="020B0604020202020204" pitchFamily="34" charset="0"/>
+              <a:buChar char="•"/>
+              <a:defRPr sz="1800" kern="1200">
+                <a:solidFill>
+                  <a:schemeClr val="tx1"/>
+                </a:solidFill>
+                <a:latin typeface="+mn-lt"/>
+                <a:ea typeface="+mn-ea"/>
+                <a:cs typeface="+mn-cs"/>
+              </a:defRPr>
+            </a:lvl5pPr>
+            <a:lvl6pPr marL="2514600" indent="-228600" algn="l" defTabSz="914400" rtl="0" eaLnBrk="1" latinLnBrk="0" hangingPunct="1">
+              <a:lnSpc>
+                <a:spcPct val="90000"/>
+              </a:lnSpc>
+              <a:spcBef>
+                <a:spcPts val="500"/>
+              </a:spcBef>
+              <a:buFont typeface="Arial" panose="020B0604020202020204" pitchFamily="34" charset="0"/>
+              <a:buChar char="•"/>
+              <a:defRPr sz="1800" kern="1200">
+                <a:solidFill>
+                  <a:schemeClr val="tx1"/>
+                </a:solidFill>
+                <a:latin typeface="+mn-lt"/>
+                <a:ea typeface="+mn-ea"/>
+                <a:cs typeface="+mn-cs"/>
+              </a:defRPr>
+            </a:lvl6pPr>
+            <a:lvl7pPr marL="2971800" indent="-228600" algn="l" defTabSz="914400" rtl="0" eaLnBrk="1" latinLnBrk="0" hangingPunct="1">
+              <a:lnSpc>
+                <a:spcPct val="90000"/>
+              </a:lnSpc>
+              <a:spcBef>
+                <a:spcPts val="500"/>
+              </a:spcBef>
+              <a:buFont typeface="Arial" panose="020B0604020202020204" pitchFamily="34" charset="0"/>
+              <a:buChar char="•"/>
+              <a:defRPr sz="1800" kern="1200">
+                <a:solidFill>
+                  <a:schemeClr val="tx1"/>
+                </a:solidFill>
+                <a:latin typeface="+mn-lt"/>
+                <a:ea typeface="+mn-ea"/>
+                <a:cs typeface="+mn-cs"/>
+              </a:defRPr>
+            </a:lvl7pPr>
+            <a:lvl8pPr marL="3429000" indent="-228600" algn="l" defTabSz="914400" rtl="0" eaLnBrk="1" latinLnBrk="0" hangingPunct="1">
+              <a:lnSpc>
+                <a:spcPct val="90000"/>
+              </a:lnSpc>
+              <a:spcBef>
+                <a:spcPts val="500"/>
+              </a:spcBef>
+              <a:buFont typeface="Arial" panose="020B0604020202020204" pitchFamily="34" charset="0"/>
+              <a:buChar char="•"/>
+              <a:defRPr sz="1800" kern="1200">
+                <a:solidFill>
+                  <a:schemeClr val="tx1"/>
+                </a:solidFill>
+                <a:latin typeface="+mn-lt"/>
+                <a:ea typeface="+mn-ea"/>
+                <a:cs typeface="+mn-cs"/>
+              </a:defRPr>
+            </a:lvl8pPr>
+            <a:lvl9pPr marL="3886200" indent="-228600" algn="l" defTabSz="914400" rtl="0" eaLnBrk="1" latinLnBrk="0" hangingPunct="1">
+              <a:lnSpc>
+                <a:spcPct val="90000"/>
+              </a:lnSpc>
+              <a:spcBef>
+                <a:spcPts val="500"/>
+              </a:spcBef>
+              <a:buFont typeface="Arial" panose="020B0604020202020204" pitchFamily="34" charset="0"/>
+              <a:buChar char="•"/>
+              <a:defRPr sz="1800" kern="1200">
+                <a:solidFill>
+                  <a:schemeClr val="tx1"/>
+                </a:solidFill>
+                <a:latin typeface="+mn-lt"/>
+                <a:ea typeface="+mn-ea"/>
+                <a:cs typeface="+mn-cs"/>
+              </a:defRPr>
+            </a:lvl9pPr>
+          </a:lstStyle>
+          <a:p>
+            <a:pPr marL="0" indent="0">
+              <a:buNone/>
+            </a:pPr>
+            <a:r>
+              <a:rPr lang="en-US" sz="2400" b="1" dirty="0"/>
+              <a:t>16- </a:t>
+            </a:r>
+            <a:r>
+              <a:rPr lang="en-US" sz="2400" b="1" dirty="0" err="1"/>
+              <a:t>Llenar</a:t>
+            </a:r>
+            <a:r>
+              <a:rPr lang="en-US" sz="2400" b="1" dirty="0"/>
+              <a:t> “</a:t>
+            </a:r>
+            <a:r>
+              <a:rPr lang="en-US" sz="2400" b="1" dirty="0" err="1"/>
+              <a:t>Locacion</a:t>
+            </a:r>
+            <a:r>
+              <a:rPr lang="en-US" sz="2400" b="1" dirty="0"/>
+              <a:t>” con el campo [</a:t>
+            </a:r>
+            <a:r>
+              <a:rPr lang="en-US" sz="2400" b="1" dirty="0" err="1"/>
+              <a:t>alcaldia_catalogo</a:t>
+            </a:r>
+            <a:r>
+              <a:rPr lang="en-US" sz="2400" b="1" dirty="0"/>
+              <a:t>] y el “Buble size/ size”, observer la </a:t>
+            </a:r>
+            <a:r>
+              <a:rPr lang="en-US" sz="2400" b="1" dirty="0" err="1"/>
+              <a:t>distribucion</a:t>
+            </a:r>
+            <a:r>
+              <a:rPr lang="en-US" sz="2400" b="1" dirty="0"/>
+              <a:t> de las </a:t>
+            </a:r>
+            <a:r>
+              <a:rPr lang="en-US" sz="2400" b="1" dirty="0" err="1"/>
+              <a:t>burbujas</a:t>
+            </a:r>
+            <a:r>
+              <a:rPr lang="en-US" sz="2400" b="1" dirty="0"/>
+              <a:t>, </a:t>
+            </a:r>
+            <a:r>
+              <a:rPr lang="en-US" sz="2400" b="1" dirty="0" err="1"/>
+              <a:t>observar</a:t>
+            </a:r>
+            <a:r>
+              <a:rPr lang="en-US" sz="2400" b="1" dirty="0"/>
+              <a:t> las “Venustiano Carranza” que se </a:t>
+            </a:r>
+            <a:r>
+              <a:rPr lang="en-US" sz="2400" b="1" dirty="0" err="1"/>
+              <a:t>observa</a:t>
+            </a:r>
+            <a:r>
+              <a:rPr lang="en-US" sz="2400" b="1" dirty="0"/>
+              <a:t> fuera de CDMX</a:t>
+            </a:r>
+          </a:p>
+        </p:txBody>
+      </p:sp>
+      <p:pic>
+        <p:nvPicPr>
+          <p:cNvPr id="8" name="Picture 7">
+            <a:extLst>
+              <a:ext uri="{FF2B5EF4-FFF2-40B4-BE49-F238E27FC236}">
+                <a16:creationId xmlns:a16="http://schemas.microsoft.com/office/drawing/2014/main" id="{90FC4DCC-003D-585B-4AC0-2755D170F18D}"/>
+              </a:ext>
+            </a:extLst>
+          </p:cNvPr>
+          <p:cNvPicPr>
+            <a:picLocks noChangeAspect="1"/>
+          </p:cNvPicPr>
+          <p:nvPr/>
+        </p:nvPicPr>
+        <p:blipFill>
+          <a:blip r:embed="rId3"/>
+          <a:stretch>
+            <a:fillRect/>
+          </a:stretch>
+        </p:blipFill>
+        <p:spPr>
+          <a:xfrm>
+            <a:off x="946077" y="2674525"/>
+            <a:ext cx="1684166" cy="2179509"/>
+          </a:xfrm>
+          <a:prstGeom prst="rect">
+            <a:avLst/>
+          </a:prstGeom>
+        </p:spPr>
+      </p:pic>
+      <p:sp>
+        <p:nvSpPr>
+          <p:cNvPr id="9" name="Content Placeholder 2">
+            <a:extLst>
+              <a:ext uri="{FF2B5EF4-FFF2-40B4-BE49-F238E27FC236}">
+                <a16:creationId xmlns:a16="http://schemas.microsoft.com/office/drawing/2014/main" id="{0FF4B277-2142-B36C-EC5B-DF216743EA7D}"/>
+              </a:ext>
+            </a:extLst>
+          </p:cNvPr>
+          <p:cNvSpPr txBox="1">
+            <a:spLocks/>
+          </p:cNvSpPr>
+          <p:nvPr/>
+        </p:nvSpPr>
+        <p:spPr>
+          <a:xfrm>
+            <a:off x="363295" y="551270"/>
+            <a:ext cx="3487345" cy="1379053"/>
+          </a:xfrm>
+          <a:prstGeom prst="rect">
+            <a:avLst/>
+          </a:prstGeom>
+        </p:spPr>
+        <p:txBody>
+          <a:bodyPr vert="horz" lIns="91440" tIns="45720" rIns="91440" bIns="45720" rtlCol="0">
+            <a:normAutofit/>
+          </a:bodyPr>
+          <a:lstStyle>
+            <a:lvl1pPr marL="228600" indent="-228600" algn="l" defTabSz="914400" rtl="0" eaLnBrk="1" latinLnBrk="0" hangingPunct="1">
+              <a:lnSpc>
+                <a:spcPct val="90000"/>
+              </a:lnSpc>
+              <a:spcBef>
+                <a:spcPts val="1000"/>
+              </a:spcBef>
+              <a:buFont typeface="Arial" panose="020B0604020202020204" pitchFamily="34" charset="0"/>
+              <a:buChar char="•"/>
+              <a:defRPr sz="2800" kern="1200">
+                <a:solidFill>
+                  <a:schemeClr val="tx1"/>
+                </a:solidFill>
+                <a:latin typeface="+mn-lt"/>
+                <a:ea typeface="+mn-ea"/>
+                <a:cs typeface="+mn-cs"/>
+              </a:defRPr>
+            </a:lvl1pPr>
+            <a:lvl2pPr marL="685800" indent="-228600" algn="l" defTabSz="914400" rtl="0" eaLnBrk="1" latinLnBrk="0" hangingPunct="1">
+              <a:lnSpc>
+                <a:spcPct val="90000"/>
+              </a:lnSpc>
+              <a:spcBef>
+                <a:spcPts val="500"/>
+              </a:spcBef>
+              <a:buFont typeface="Arial" panose="020B0604020202020204" pitchFamily="34" charset="0"/>
+              <a:buChar char="•"/>
+              <a:defRPr sz="2400" kern="1200">
+                <a:solidFill>
+                  <a:schemeClr val="tx1"/>
+                </a:solidFill>
+                <a:latin typeface="+mn-lt"/>
+                <a:ea typeface="+mn-ea"/>
+                <a:cs typeface="+mn-cs"/>
+              </a:defRPr>
+            </a:lvl2pPr>
+            <a:lvl3pPr marL="1143000" indent="-228600" algn="l" defTabSz="914400" rtl="0" eaLnBrk="1" latinLnBrk="0" hangingPunct="1">
+              <a:lnSpc>
+                <a:spcPct val="90000"/>
+              </a:lnSpc>
+              <a:spcBef>
+                <a:spcPts val="500"/>
+              </a:spcBef>
+              <a:buFont typeface="Arial" panose="020B0604020202020204" pitchFamily="34" charset="0"/>
+              <a:buChar char="•"/>
+              <a:defRPr sz="2000" kern="1200">
+                <a:solidFill>
+                  <a:schemeClr val="tx1"/>
+                </a:solidFill>
+                <a:latin typeface="+mn-lt"/>
+                <a:ea typeface="+mn-ea"/>
+                <a:cs typeface="+mn-cs"/>
+              </a:defRPr>
+            </a:lvl3pPr>
+            <a:lvl4pPr marL="1600200" indent="-228600" algn="l" defTabSz="914400" rtl="0" eaLnBrk="1" latinLnBrk="0" hangingPunct="1">
+              <a:lnSpc>
+                <a:spcPct val="90000"/>
+              </a:lnSpc>
+              <a:spcBef>
+                <a:spcPts val="500"/>
+              </a:spcBef>
+              <a:buFont typeface="Arial" panose="020B0604020202020204" pitchFamily="34" charset="0"/>
+              <a:buChar char="•"/>
+              <a:defRPr sz="1800" kern="1200">
+                <a:solidFill>
+                  <a:schemeClr val="tx1"/>
+                </a:solidFill>
+                <a:latin typeface="+mn-lt"/>
+                <a:ea typeface="+mn-ea"/>
+                <a:cs typeface="+mn-cs"/>
+              </a:defRPr>
+            </a:lvl4pPr>
+            <a:lvl5pPr marL="2057400" indent="-228600" algn="l" defTabSz="914400" rtl="0" eaLnBrk="1" latinLnBrk="0" hangingPunct="1">
+              <a:lnSpc>
+                <a:spcPct val="90000"/>
+              </a:lnSpc>
+              <a:spcBef>
+                <a:spcPts val="500"/>
+              </a:spcBef>
+              <a:buFont typeface="Arial" panose="020B0604020202020204" pitchFamily="34" charset="0"/>
+              <a:buChar char="•"/>
+              <a:defRPr sz="1800" kern="1200">
+                <a:solidFill>
+                  <a:schemeClr val="tx1"/>
+                </a:solidFill>
+                <a:latin typeface="+mn-lt"/>
+                <a:ea typeface="+mn-ea"/>
+                <a:cs typeface="+mn-cs"/>
+              </a:defRPr>
+            </a:lvl5pPr>
+            <a:lvl6pPr marL="2514600" indent="-228600" algn="l" defTabSz="914400" rtl="0" eaLnBrk="1" latinLnBrk="0" hangingPunct="1">
+              <a:lnSpc>
+                <a:spcPct val="90000"/>
+              </a:lnSpc>
+              <a:spcBef>
+                <a:spcPts val="500"/>
+              </a:spcBef>
+              <a:buFont typeface="Arial" panose="020B0604020202020204" pitchFamily="34" charset="0"/>
+              <a:buChar char="•"/>
+              <a:defRPr sz="1800" kern="1200">
+                <a:solidFill>
+                  <a:schemeClr val="tx1"/>
+                </a:solidFill>
+                <a:latin typeface="+mn-lt"/>
+                <a:ea typeface="+mn-ea"/>
+                <a:cs typeface="+mn-cs"/>
+              </a:defRPr>
+            </a:lvl6pPr>
+            <a:lvl7pPr marL="2971800" indent="-228600" algn="l" defTabSz="914400" rtl="0" eaLnBrk="1" latinLnBrk="0" hangingPunct="1">
+              <a:lnSpc>
+                <a:spcPct val="90000"/>
+              </a:lnSpc>
+              <a:spcBef>
+                <a:spcPts val="500"/>
+              </a:spcBef>
+              <a:buFont typeface="Arial" panose="020B0604020202020204" pitchFamily="34" charset="0"/>
+              <a:buChar char="•"/>
+              <a:defRPr sz="1800" kern="1200">
+                <a:solidFill>
+                  <a:schemeClr val="tx1"/>
+                </a:solidFill>
+                <a:latin typeface="+mn-lt"/>
+                <a:ea typeface="+mn-ea"/>
+                <a:cs typeface="+mn-cs"/>
+              </a:defRPr>
+            </a:lvl7pPr>
+            <a:lvl8pPr marL="3429000" indent="-228600" algn="l" defTabSz="914400" rtl="0" eaLnBrk="1" latinLnBrk="0" hangingPunct="1">
+              <a:lnSpc>
+                <a:spcPct val="90000"/>
+              </a:lnSpc>
+              <a:spcBef>
+                <a:spcPts val="500"/>
+              </a:spcBef>
+              <a:buFont typeface="Arial" panose="020B0604020202020204" pitchFamily="34" charset="0"/>
+              <a:buChar char="•"/>
+              <a:defRPr sz="1800" kern="1200">
+                <a:solidFill>
+                  <a:schemeClr val="tx1"/>
+                </a:solidFill>
+                <a:latin typeface="+mn-lt"/>
+                <a:ea typeface="+mn-ea"/>
+                <a:cs typeface="+mn-cs"/>
+              </a:defRPr>
+            </a:lvl8pPr>
+            <a:lvl9pPr marL="3886200" indent="-228600" algn="l" defTabSz="914400" rtl="0" eaLnBrk="1" latinLnBrk="0" hangingPunct="1">
+              <a:lnSpc>
+                <a:spcPct val="90000"/>
+              </a:lnSpc>
+              <a:spcBef>
+                <a:spcPts val="500"/>
+              </a:spcBef>
+              <a:buFont typeface="Arial" panose="020B0604020202020204" pitchFamily="34" charset="0"/>
+              <a:buChar char="•"/>
+              <a:defRPr sz="1800" kern="1200">
+                <a:solidFill>
+                  <a:schemeClr val="tx1"/>
+                </a:solidFill>
+                <a:latin typeface="+mn-lt"/>
+                <a:ea typeface="+mn-ea"/>
+                <a:cs typeface="+mn-cs"/>
+              </a:defRPr>
+            </a:lvl9pPr>
+          </a:lstStyle>
+          <a:p>
+            <a:pPr marL="0" indent="0">
+              <a:buFont typeface="Arial" panose="020B0604020202020204" pitchFamily="34" charset="0"/>
+              <a:buNone/>
+            </a:pPr>
+            <a:r>
+              <a:rPr lang="en-US" sz="2400" b="1" dirty="0"/>
+              <a:t>15- </a:t>
+            </a:r>
+            <a:r>
+              <a:rPr lang="en-US" sz="2400" b="1" dirty="0" err="1"/>
+              <a:t>Agregar</a:t>
+            </a:r>
+            <a:r>
+              <a:rPr lang="en-US" sz="2400" b="1" dirty="0"/>
+              <a:t> el “Map” o </a:t>
+            </a:r>
+            <a:r>
+              <a:rPr lang="en-US" sz="2400" b="1" dirty="0" err="1"/>
+              <a:t>un“Azure</a:t>
+            </a:r>
+            <a:r>
+              <a:rPr lang="en-US" sz="2400" b="1" dirty="0"/>
+              <a:t> Map”</a:t>
+            </a:r>
+          </a:p>
+        </p:txBody>
+      </p:sp>
+    </p:spTree>
+    <p:extLst>
+      <p:ext uri="{BB962C8B-B14F-4D97-AF65-F5344CB8AC3E}">
+        <p14:creationId xmlns:p14="http://schemas.microsoft.com/office/powerpoint/2010/main" val="3913378663"/>
       </p:ext>
     </p:extLst>
   </p:cSld>
